--- a/knowledge/Productivity/Fan_Native_Master.pptx
+++ b/knowledge/Productivity/Fan_Native_Master.pptx
@@ -3165,15 +3165,15 @@
           <p:nvPr/>
         </p:nvSpPr>
         <p:spPr>
-          <a:xfrm rot="17160000">
-            <a:off x="6949440" y="3364992"/>
-            <a:ext cx="4206240" cy="36576"/>
+          <a:xfrm rot="17970000">
+            <a:off x="6858000" y="3456432"/>
+            <a:ext cx="4114800" cy="36576"/>
           </a:xfrm>
           <a:prstGeom prst="rect">
             <a:avLst/>
           </a:prstGeom>
           <a:solidFill>
-            <a:srgbClr val="A08250"/>
+            <a:srgbClr val="96784B"/>
           </a:solidFill>
           <a:ln>
             <a:noFill/>
@@ -3208,15 +3208,15 @@
           <p:nvPr/>
         </p:nvSpPr>
         <p:spPr>
-          <a:xfrm rot="17160000">
-            <a:off x="6949440" y="3364992"/>
-            <a:ext cx="4206240" cy="36576"/>
+          <a:xfrm rot="17970000">
+            <a:off x="6858000" y="3456432"/>
+            <a:ext cx="4114800" cy="36576"/>
           </a:xfrm>
           <a:prstGeom prst="rect">
             <a:avLst/>
           </a:prstGeom>
           <a:solidFill>
-            <a:srgbClr val="A08250"/>
+            <a:srgbClr val="96784B"/>
           </a:solidFill>
           <a:ln>
             <a:noFill/>
@@ -3251,15 +3251,15 @@
           <p:nvPr/>
         </p:nvSpPr>
         <p:spPr>
-          <a:xfrm rot="17160000">
-            <a:off x="6949440" y="3364992"/>
-            <a:ext cx="4206240" cy="36576"/>
+          <a:xfrm rot="17970000">
+            <a:off x="6858000" y="3456432"/>
+            <a:ext cx="4114800" cy="36576"/>
           </a:xfrm>
           <a:prstGeom prst="rect">
             <a:avLst/>
           </a:prstGeom>
           <a:solidFill>
-            <a:srgbClr val="A08250"/>
+            <a:srgbClr val="96784B"/>
           </a:solidFill>
           <a:ln>
             <a:noFill/>
@@ -3294,15 +3294,15 @@
           <p:nvPr/>
         </p:nvSpPr>
         <p:spPr>
-          <a:xfrm rot="17160000">
-            <a:off x="6949440" y="3364992"/>
-            <a:ext cx="4206240" cy="36576"/>
+          <a:xfrm rot="17970000">
+            <a:off x="6858000" y="3456432"/>
+            <a:ext cx="4114800" cy="36576"/>
           </a:xfrm>
           <a:prstGeom prst="rect">
             <a:avLst/>
           </a:prstGeom>
           <a:solidFill>
-            <a:srgbClr val="A08250"/>
+            <a:srgbClr val="96784B"/>
           </a:solidFill>
           <a:ln>
             <a:noFill/>
@@ -3337,15 +3337,15 @@
           <p:nvPr/>
         </p:nvSpPr>
         <p:spPr>
-          <a:xfrm rot="17160000">
-            <a:off x="6949440" y="3364992"/>
-            <a:ext cx="4206240" cy="36576"/>
+          <a:xfrm rot="17970000">
+            <a:off x="6858000" y="3456432"/>
+            <a:ext cx="4114800" cy="36576"/>
           </a:xfrm>
           <a:prstGeom prst="rect">
             <a:avLst/>
           </a:prstGeom>
           <a:solidFill>
-            <a:srgbClr val="A08250"/>
+            <a:srgbClr val="96784B"/>
           </a:solidFill>
           <a:ln>
             <a:noFill/>
@@ -3380,15 +3380,15 @@
           <p:nvPr/>
         </p:nvSpPr>
         <p:spPr>
-          <a:xfrm rot="17160000">
-            <a:off x="6949440" y="3364992"/>
-            <a:ext cx="4206240" cy="36576"/>
+          <a:xfrm rot="17970000">
+            <a:off x="6858000" y="3456432"/>
+            <a:ext cx="4114800" cy="36576"/>
           </a:xfrm>
           <a:prstGeom prst="rect">
             <a:avLst/>
           </a:prstGeom>
           <a:solidFill>
-            <a:srgbClr val="A08250"/>
+            <a:srgbClr val="96784B"/>
           </a:solidFill>
           <a:ln>
             <a:noFill/>
@@ -3424,13 +3424,13 @@
         </p:nvSpPr>
         <p:spPr>
           <a:xfrm rot="17160000">
-            <a:off x="2743200" y="-822960"/>
-            <a:ext cx="8412480" cy="8412480"/>
+            <a:off x="2743200" y="-640080"/>
+            <a:ext cx="8229600" cy="8229600"/>
           </a:xfrm>
           <a:prstGeom prst="blockArc">
             <a:avLst>
-              <a:gd name="adj1" fmla="val 2650000"/>
-              <a:gd name="adj2" fmla="val 0"/>
+              <a:gd name="adj1" fmla="val 0"/>
+              <a:gd name="adj2" fmla="val 2700000"/>
               <a:gd name="adj3" fmla="val 32000"/>
             </a:avLst>
           </a:prstGeom>
@@ -3446,7 +3446,7 @@
                   <a:alpha val="88000"/>
                 </a:srgbClr>
               </a:gs>
-              <a:gs pos="40000">
+              <a:gs pos="45000">
                 <a:srgbClr val="78A365">
                   <a:alpha val="82000"/>
                 </a:srgbClr>
@@ -3459,14 +3459,6 @@
             </a:gsLst>
             <a:lin ang="5400000"/>
           </a:gradFill>
-          <a:effectLst>
-            <a:softEdge rad="25400"/>
-            <a:outerShdw blurRad="63500" dist="0" dir="0" algn="ctr" rotWithShape="0">
-              <a:srgbClr val="000000">
-                <a:alpha val="15000"/>
-              </a:srgbClr>
-            </a:outerShdw>
-          </a:effectLst>
         </p:spPr>
         <p:style>
           <a:lnRef idx="1">
@@ -3498,13 +3490,13 @@
         </p:nvSpPr>
         <p:spPr>
           <a:xfrm rot="17160000">
-            <a:off x="2743200" y="-822960"/>
-            <a:ext cx="8412480" cy="8412480"/>
+            <a:off x="2743200" y="-640080"/>
+            <a:ext cx="8229600" cy="8229600"/>
           </a:xfrm>
           <a:prstGeom prst="blockArc">
             <a:avLst>
-              <a:gd name="adj1" fmla="val 2650000"/>
-              <a:gd name="adj2" fmla="val 0"/>
+              <a:gd name="adj1" fmla="val 0"/>
+              <a:gd name="adj2" fmla="val 2700000"/>
               <a:gd name="adj3" fmla="val 32000"/>
             </a:avLst>
           </a:prstGeom>
@@ -3520,7 +3512,7 @@
                   <a:alpha val="88000"/>
                 </a:srgbClr>
               </a:gs>
-              <a:gs pos="40000">
+              <a:gs pos="45000">
                 <a:srgbClr val="78A365">
                   <a:alpha val="82000"/>
                 </a:srgbClr>
@@ -3533,14 +3525,6 @@
             </a:gsLst>
             <a:lin ang="5400000"/>
           </a:gradFill>
-          <a:effectLst>
-            <a:softEdge rad="25400"/>
-            <a:outerShdw blurRad="63500" dist="0" dir="0" algn="ctr" rotWithShape="0">
-              <a:srgbClr val="000000">
-                <a:alpha val="15000"/>
-              </a:srgbClr>
-            </a:outerShdw>
-          </a:effectLst>
         </p:spPr>
         <p:style>
           <a:lnRef idx="1">
@@ -3572,13 +3556,13 @@
         </p:nvSpPr>
         <p:spPr>
           <a:xfrm rot="17160000">
-            <a:off x="2743200" y="-822960"/>
-            <a:ext cx="8412480" cy="8412480"/>
+            <a:off x="2743200" y="-640080"/>
+            <a:ext cx="8229600" cy="8229600"/>
           </a:xfrm>
           <a:prstGeom prst="blockArc">
             <a:avLst>
-              <a:gd name="adj1" fmla="val 2650000"/>
-              <a:gd name="adj2" fmla="val 0"/>
+              <a:gd name="adj1" fmla="val 0"/>
+              <a:gd name="adj2" fmla="val 2700000"/>
               <a:gd name="adj3" fmla="val 32000"/>
             </a:avLst>
           </a:prstGeom>
@@ -3594,7 +3578,7 @@
                   <a:alpha val="88000"/>
                 </a:srgbClr>
               </a:gs>
-              <a:gs pos="40000">
+              <a:gs pos="45000">
                 <a:srgbClr val="78A365">
                   <a:alpha val="82000"/>
                 </a:srgbClr>
@@ -3607,14 +3591,6 @@
             </a:gsLst>
             <a:lin ang="5400000"/>
           </a:gradFill>
-          <a:effectLst>
-            <a:softEdge rad="25400"/>
-            <a:outerShdw blurRad="63500" dist="0" dir="0" algn="ctr" rotWithShape="0">
-              <a:srgbClr val="000000">
-                <a:alpha val="15000"/>
-              </a:srgbClr>
-            </a:outerShdw>
-          </a:effectLst>
         </p:spPr>
         <p:style>
           <a:lnRef idx="1">
@@ -3646,13 +3622,13 @@
         </p:nvSpPr>
         <p:spPr>
           <a:xfrm rot="17160000">
-            <a:off x="2743200" y="-822960"/>
-            <a:ext cx="8412480" cy="8412480"/>
+            <a:off x="2743200" y="-640080"/>
+            <a:ext cx="8229600" cy="8229600"/>
           </a:xfrm>
           <a:prstGeom prst="blockArc">
             <a:avLst>
-              <a:gd name="adj1" fmla="val 2650000"/>
-              <a:gd name="adj2" fmla="val 0"/>
+              <a:gd name="adj1" fmla="val 0"/>
+              <a:gd name="adj2" fmla="val 2700000"/>
               <a:gd name="adj3" fmla="val 32000"/>
             </a:avLst>
           </a:prstGeom>
@@ -3668,7 +3644,7 @@
                   <a:alpha val="88000"/>
                 </a:srgbClr>
               </a:gs>
-              <a:gs pos="40000">
+              <a:gs pos="45000">
                 <a:srgbClr val="78A365">
                   <a:alpha val="82000"/>
                 </a:srgbClr>
@@ -3681,14 +3657,6 @@
             </a:gsLst>
             <a:lin ang="5400000"/>
           </a:gradFill>
-          <a:effectLst>
-            <a:softEdge rad="25400"/>
-            <a:outerShdw blurRad="63500" dist="0" dir="0" algn="ctr" rotWithShape="0">
-              <a:srgbClr val="000000">
-                <a:alpha val="15000"/>
-              </a:srgbClr>
-            </a:outerShdw>
-          </a:effectLst>
         </p:spPr>
         <p:style>
           <a:lnRef idx="1">
@@ -3720,13 +3688,13 @@
         </p:nvSpPr>
         <p:spPr>
           <a:xfrm rot="17160000">
-            <a:off x="2743200" y="-822960"/>
-            <a:ext cx="8412480" cy="8412480"/>
+            <a:off x="2743200" y="-640080"/>
+            <a:ext cx="8229600" cy="8229600"/>
           </a:xfrm>
           <a:prstGeom prst="blockArc">
             <a:avLst>
-              <a:gd name="adj1" fmla="val 2650000"/>
-              <a:gd name="adj2" fmla="val 0"/>
+              <a:gd name="adj1" fmla="val 0"/>
+              <a:gd name="adj2" fmla="val 2700000"/>
               <a:gd name="adj3" fmla="val 32000"/>
             </a:avLst>
           </a:prstGeom>
@@ -3742,7 +3710,7 @@
                   <a:alpha val="88000"/>
                 </a:srgbClr>
               </a:gs>
-              <a:gs pos="40000">
+              <a:gs pos="45000">
                 <a:srgbClr val="78A365">
                   <a:alpha val="82000"/>
                 </a:srgbClr>
@@ -3755,14 +3723,6 @@
             </a:gsLst>
             <a:lin ang="5400000"/>
           </a:gradFill>
-          <a:effectLst>
-            <a:softEdge rad="25400"/>
-            <a:outerShdw blurRad="63500" dist="0" dir="0" algn="ctr" rotWithShape="0">
-              <a:srgbClr val="000000">
-                <a:alpha val="15000"/>
-              </a:srgbClr>
-            </a:outerShdw>
-          </a:effectLst>
         </p:spPr>
         <p:style>
           <a:lnRef idx="1">
@@ -3794,13 +3754,13 @@
         </p:nvSpPr>
         <p:spPr>
           <a:xfrm rot="17160000">
-            <a:off x="2743200" y="-822960"/>
-            <a:ext cx="8412480" cy="8412480"/>
+            <a:off x="2743200" y="-640080"/>
+            <a:ext cx="8229600" cy="8229600"/>
           </a:xfrm>
           <a:prstGeom prst="blockArc">
             <a:avLst>
-              <a:gd name="adj1" fmla="val 2650000"/>
-              <a:gd name="adj2" fmla="val 0"/>
+              <a:gd name="adj1" fmla="val 0"/>
+              <a:gd name="adj2" fmla="val 2700000"/>
               <a:gd name="adj3" fmla="val 32000"/>
             </a:avLst>
           </a:prstGeom>
@@ -3816,7 +3776,7 @@
                   <a:alpha val="88000"/>
                 </a:srgbClr>
               </a:gs>
-              <a:gs pos="40000">
+              <a:gs pos="45000">
                 <a:srgbClr val="78A365">
                   <a:alpha val="82000"/>
                 </a:srgbClr>
@@ -3829,14 +3789,6 @@
             </a:gsLst>
             <a:lin ang="5400000"/>
           </a:gradFill>
-          <a:effectLst>
-            <a:softEdge rad="25400"/>
-            <a:outerShdw blurRad="63500" dist="0" dir="0" algn="ctr" rotWithShape="0">
-              <a:srgbClr val="000000">
-                <a:alpha val="15000"/>
-              </a:srgbClr>
-            </a:outerShdw>
-          </a:effectLst>
         </p:spPr>
         <p:style>
           <a:lnRef idx="1">
@@ -3868,8 +3820,8 @@
         </p:nvSpPr>
         <p:spPr>
           <a:xfrm>
-            <a:off x="6565392" y="2999232"/>
-            <a:ext cx="768096" cy="768096"/>
+            <a:off x="6492240" y="3108960"/>
+            <a:ext cx="731520" cy="731520"/>
           </a:xfrm>
           <a:prstGeom prst="ellipse">
             <a:avLst/>
@@ -3913,8 +3865,8 @@
         </p:nvSpPr>
         <p:spPr>
           <a:xfrm>
-            <a:off x="6729984" y="3163824"/>
-            <a:ext cx="438912" cy="438912"/>
+            <a:off x="6656832" y="3273552"/>
+            <a:ext cx="402336" cy="402336"/>
           </a:xfrm>
           <a:prstGeom prst="ellipse">
             <a:avLst/>
@@ -3956,8 +3908,8 @@
         </p:nvSpPr>
         <p:spPr>
           <a:xfrm>
-            <a:off x="6821424" y="3255264"/>
-            <a:ext cx="256032" cy="256032"/>
+            <a:off x="6748272" y="3364992"/>
+            <a:ext cx="219456" cy="219456"/>
           </a:xfrm>
           <a:prstGeom prst="ellipse">
             <a:avLst/>
@@ -3999,7 +3951,7 @@
         </p:nvSpPr>
         <p:spPr>
           <a:xfrm>
-            <a:off x="3291840" y="-2377440"/>
+            <a:off x="3200400" y="-2286000"/>
             <a:ext cx="5486400" cy="1371600"/>
           </a:xfrm>
           <a:prstGeom prst="rect">
@@ -4014,7 +3966,7 @@
           <a:lstStyle/>
           <a:p>
             <a:pPr>
-              <a:defRPr sz="5600" b="1">
+              <a:defRPr sz="5400" b="1">
                 <a:solidFill>
                   <a:srgbClr val="162314"/>
                 </a:solidFill>
@@ -4034,8 +3986,8 @@
         </p:nvSpPr>
         <p:spPr>
           <a:xfrm>
-            <a:off x="8961120" y="-2103120"/>
-            <a:ext cx="621792" cy="621792"/>
+            <a:off x="8961120" y="-2011680"/>
+            <a:ext cx="594360" cy="594360"/>
           </a:xfrm>
           <a:prstGeom prst="roundRect">
             <a:avLst/>
@@ -4394,15 +4346,15 @@
           <p:nvPr/>
         </p:nvSpPr>
         <p:spPr>
-          <a:xfrm rot="17955000">
-            <a:off x="6949440" y="3364992"/>
-            <a:ext cx="4206240" cy="36576"/>
+          <a:xfrm rot="17970000">
+            <a:off x="6858000" y="3456432"/>
+            <a:ext cx="4114800" cy="36576"/>
           </a:xfrm>
           <a:prstGeom prst="rect">
             <a:avLst/>
           </a:prstGeom>
           <a:solidFill>
-            <a:srgbClr val="A08250"/>
+            <a:srgbClr val="96784B"/>
           </a:solidFill>
           <a:ln>
             <a:noFill/>
@@ -4437,15 +4389,15 @@
           <p:nvPr/>
         </p:nvSpPr>
         <p:spPr>
-          <a:xfrm rot="19725000">
-            <a:off x="6949440" y="3364992"/>
-            <a:ext cx="4206240" cy="36576"/>
+          <a:xfrm rot="19740000">
+            <a:off x="6858000" y="3456432"/>
+            <a:ext cx="4114800" cy="36576"/>
           </a:xfrm>
           <a:prstGeom prst="rect">
             <a:avLst/>
           </a:prstGeom>
           <a:solidFill>
-            <a:srgbClr val="A08250"/>
+            <a:srgbClr val="96784B"/>
           </a:solidFill>
           <a:ln>
             <a:noFill/>
@@ -4480,15 +4432,15 @@
           <p:nvPr/>
         </p:nvSpPr>
         <p:spPr>
-          <a:xfrm rot="21495000">
-            <a:off x="6949440" y="3364992"/>
-            <a:ext cx="4206240" cy="36576"/>
+          <a:xfrm rot="21510000">
+            <a:off x="6858000" y="3456432"/>
+            <a:ext cx="4114800" cy="36576"/>
           </a:xfrm>
           <a:prstGeom prst="rect">
             <a:avLst/>
           </a:prstGeom>
           <a:solidFill>
-            <a:srgbClr val="A08250"/>
+            <a:srgbClr val="96784B"/>
           </a:solidFill>
           <a:ln>
             <a:noFill/>
@@ -4523,15 +4475,15 @@
           <p:nvPr/>
         </p:nvSpPr>
         <p:spPr>
-          <a:xfrm rot="1665000">
-            <a:off x="6949440" y="3364992"/>
-            <a:ext cx="4206240" cy="36576"/>
+          <a:xfrm rot="1680000">
+            <a:off x="6858000" y="3456432"/>
+            <a:ext cx="4114800" cy="36576"/>
           </a:xfrm>
           <a:prstGeom prst="rect">
             <a:avLst/>
           </a:prstGeom>
           <a:solidFill>
-            <a:srgbClr val="A08250"/>
+            <a:srgbClr val="96784B"/>
           </a:solidFill>
           <a:ln>
             <a:noFill/>
@@ -4566,15 +4518,15 @@
           <p:nvPr/>
         </p:nvSpPr>
         <p:spPr>
-          <a:xfrm rot="3435000">
-            <a:off x="6949440" y="3364992"/>
-            <a:ext cx="4206240" cy="36576"/>
+          <a:xfrm rot="3450000">
+            <a:off x="6858000" y="3456432"/>
+            <a:ext cx="4114800" cy="36576"/>
           </a:xfrm>
           <a:prstGeom prst="rect">
             <a:avLst/>
           </a:prstGeom>
           <a:solidFill>
-            <a:srgbClr val="A08250"/>
+            <a:srgbClr val="96784B"/>
           </a:solidFill>
           <a:ln>
             <a:noFill/>
@@ -4609,15 +4561,15 @@
           <p:nvPr/>
         </p:nvSpPr>
         <p:spPr>
-          <a:xfrm rot="5205000">
-            <a:off x="6949440" y="3364992"/>
-            <a:ext cx="4206240" cy="36576"/>
+          <a:xfrm rot="5220000">
+            <a:off x="6858000" y="3456432"/>
+            <a:ext cx="4114800" cy="36576"/>
           </a:xfrm>
           <a:prstGeom prst="rect">
             <a:avLst/>
           </a:prstGeom>
           <a:solidFill>
-            <a:srgbClr val="A08250"/>
+            <a:srgbClr val="96784B"/>
           </a:solidFill>
           <a:ln>
             <a:noFill/>
@@ -4653,13 +4605,13 @@
         </p:nvSpPr>
         <p:spPr>
           <a:xfrm rot="17160000">
-            <a:off x="2743200" y="-822960"/>
-            <a:ext cx="8412480" cy="8412480"/>
+            <a:off x="2743200" y="-640080"/>
+            <a:ext cx="8229600" cy="8229600"/>
           </a:xfrm>
           <a:prstGeom prst="blockArc">
             <a:avLst>
-              <a:gd name="adj1" fmla="val 2650000"/>
-              <a:gd name="adj2" fmla="val 0"/>
+              <a:gd name="adj1" fmla="val 0"/>
+              <a:gd name="adj2" fmla="val 2700000"/>
               <a:gd name="adj3" fmla="val 32000"/>
             </a:avLst>
           </a:prstGeom>
@@ -4675,7 +4627,7 @@
                   <a:alpha val="88000"/>
                 </a:srgbClr>
               </a:gs>
-              <a:gs pos="40000">
+              <a:gs pos="45000">
                 <a:srgbClr val="78A365">
                   <a:alpha val="82000"/>
                 </a:srgbClr>
@@ -4688,14 +4640,6 @@
             </a:gsLst>
             <a:lin ang="5400000"/>
           </a:gradFill>
-          <a:effectLst>
-            <a:softEdge rad="25400"/>
-            <a:outerShdw blurRad="63500" dist="0" dir="0" algn="ctr" rotWithShape="0">
-              <a:srgbClr val="000000">
-                <a:alpha val="15000"/>
-              </a:srgbClr>
-            </a:outerShdw>
-          </a:effectLst>
         </p:spPr>
         <p:style>
           <a:lnRef idx="1">
@@ -4727,13 +4671,13 @@
         </p:nvSpPr>
         <p:spPr>
           <a:xfrm rot="18930000">
-            <a:off x="2743200" y="-822960"/>
-            <a:ext cx="8412480" cy="8412480"/>
+            <a:off x="2743200" y="-640080"/>
+            <a:ext cx="8229600" cy="8229600"/>
           </a:xfrm>
           <a:prstGeom prst="blockArc">
             <a:avLst>
-              <a:gd name="adj1" fmla="val 2650000"/>
-              <a:gd name="adj2" fmla="val 0"/>
+              <a:gd name="adj1" fmla="val 0"/>
+              <a:gd name="adj2" fmla="val 2700000"/>
               <a:gd name="adj3" fmla="val 32000"/>
             </a:avLst>
           </a:prstGeom>
@@ -4749,7 +4693,7 @@
                   <a:alpha val="88000"/>
                 </a:srgbClr>
               </a:gs>
-              <a:gs pos="40000">
+              <a:gs pos="45000">
                 <a:srgbClr val="78A365">
                   <a:alpha val="82000"/>
                 </a:srgbClr>
@@ -4762,14 +4706,6 @@
             </a:gsLst>
             <a:lin ang="5400000"/>
           </a:gradFill>
-          <a:effectLst>
-            <a:softEdge rad="25400"/>
-            <a:outerShdw blurRad="63500" dist="0" dir="0" algn="ctr" rotWithShape="0">
-              <a:srgbClr val="000000">
-                <a:alpha val="15000"/>
-              </a:srgbClr>
-            </a:outerShdw>
-          </a:effectLst>
         </p:spPr>
         <p:style>
           <a:lnRef idx="1">
@@ -4801,13 +4737,13 @@
         </p:nvSpPr>
         <p:spPr>
           <a:xfrm rot="20700000">
-            <a:off x="2743200" y="-822960"/>
-            <a:ext cx="8412480" cy="8412480"/>
+            <a:off x="2743200" y="-640080"/>
+            <a:ext cx="8229600" cy="8229600"/>
           </a:xfrm>
           <a:prstGeom prst="blockArc">
             <a:avLst>
-              <a:gd name="adj1" fmla="val 2650000"/>
-              <a:gd name="adj2" fmla="val 0"/>
+              <a:gd name="adj1" fmla="val 0"/>
+              <a:gd name="adj2" fmla="val 2700000"/>
               <a:gd name="adj3" fmla="val 32000"/>
             </a:avLst>
           </a:prstGeom>
@@ -4823,7 +4759,7 @@
                   <a:alpha val="88000"/>
                 </a:srgbClr>
               </a:gs>
-              <a:gs pos="40000">
+              <a:gs pos="45000">
                 <a:srgbClr val="78A365">
                   <a:alpha val="82000"/>
                 </a:srgbClr>
@@ -4836,14 +4772,6 @@
             </a:gsLst>
             <a:lin ang="5400000"/>
           </a:gradFill>
-          <a:effectLst>
-            <a:softEdge rad="25400"/>
-            <a:outerShdw blurRad="63500" dist="0" dir="0" algn="ctr" rotWithShape="0">
-              <a:srgbClr val="000000">
-                <a:alpha val="15000"/>
-              </a:srgbClr>
-            </a:outerShdw>
-          </a:effectLst>
         </p:spPr>
         <p:style>
           <a:lnRef idx="1">
@@ -4875,13 +4803,13 @@
         </p:nvSpPr>
         <p:spPr>
           <a:xfrm rot="870000">
-            <a:off x="2743200" y="-822960"/>
-            <a:ext cx="8412480" cy="8412480"/>
+            <a:off x="2743200" y="-640080"/>
+            <a:ext cx="8229600" cy="8229600"/>
           </a:xfrm>
           <a:prstGeom prst="blockArc">
             <a:avLst>
-              <a:gd name="adj1" fmla="val 2650000"/>
-              <a:gd name="adj2" fmla="val 0"/>
+              <a:gd name="adj1" fmla="val 0"/>
+              <a:gd name="adj2" fmla="val 2700000"/>
               <a:gd name="adj3" fmla="val 32000"/>
             </a:avLst>
           </a:prstGeom>
@@ -4897,7 +4825,7 @@
                   <a:alpha val="88000"/>
                 </a:srgbClr>
               </a:gs>
-              <a:gs pos="40000">
+              <a:gs pos="45000">
                 <a:srgbClr val="78A365">
                   <a:alpha val="82000"/>
                 </a:srgbClr>
@@ -4910,14 +4838,6 @@
             </a:gsLst>
             <a:lin ang="5400000"/>
           </a:gradFill>
-          <a:effectLst>
-            <a:softEdge rad="25400"/>
-            <a:outerShdw blurRad="63500" dist="0" dir="0" algn="ctr" rotWithShape="0">
-              <a:srgbClr val="000000">
-                <a:alpha val="15000"/>
-              </a:srgbClr>
-            </a:outerShdw>
-          </a:effectLst>
         </p:spPr>
         <p:style>
           <a:lnRef idx="1">
@@ -4949,13 +4869,13 @@
         </p:nvSpPr>
         <p:spPr>
           <a:xfrm rot="2640000">
-            <a:off x="2743200" y="-822960"/>
-            <a:ext cx="8412480" cy="8412480"/>
+            <a:off x="2743200" y="-640080"/>
+            <a:ext cx="8229600" cy="8229600"/>
           </a:xfrm>
           <a:prstGeom prst="blockArc">
             <a:avLst>
-              <a:gd name="adj1" fmla="val 2650000"/>
-              <a:gd name="adj2" fmla="val 0"/>
+              <a:gd name="adj1" fmla="val 0"/>
+              <a:gd name="adj2" fmla="val 2700000"/>
               <a:gd name="adj3" fmla="val 32000"/>
             </a:avLst>
           </a:prstGeom>
@@ -4971,7 +4891,7 @@
                   <a:alpha val="88000"/>
                 </a:srgbClr>
               </a:gs>
-              <a:gs pos="40000">
+              <a:gs pos="45000">
                 <a:srgbClr val="78A365">
                   <a:alpha val="82000"/>
                 </a:srgbClr>
@@ -4984,14 +4904,6 @@
             </a:gsLst>
             <a:lin ang="5400000"/>
           </a:gradFill>
-          <a:effectLst>
-            <a:softEdge rad="25400"/>
-            <a:outerShdw blurRad="63500" dist="0" dir="0" algn="ctr" rotWithShape="0">
-              <a:srgbClr val="000000">
-                <a:alpha val="15000"/>
-              </a:srgbClr>
-            </a:outerShdw>
-          </a:effectLst>
         </p:spPr>
         <p:style>
           <a:lnRef idx="1">
@@ -5023,13 +4935,13 @@
         </p:nvSpPr>
         <p:spPr>
           <a:xfrm rot="4410000">
-            <a:off x="2743200" y="-822960"/>
-            <a:ext cx="8412480" cy="8412480"/>
+            <a:off x="2743200" y="-640080"/>
+            <a:ext cx="8229600" cy="8229600"/>
           </a:xfrm>
           <a:prstGeom prst="blockArc">
             <a:avLst>
-              <a:gd name="adj1" fmla="val 2650000"/>
-              <a:gd name="adj2" fmla="val 0"/>
+              <a:gd name="adj1" fmla="val 0"/>
+              <a:gd name="adj2" fmla="val 2700000"/>
               <a:gd name="adj3" fmla="val 32000"/>
             </a:avLst>
           </a:prstGeom>
@@ -5045,7 +4957,7 @@
                   <a:alpha val="88000"/>
                 </a:srgbClr>
               </a:gs>
-              <a:gs pos="40000">
+              <a:gs pos="45000">
                 <a:srgbClr val="78A365">
                   <a:alpha val="82000"/>
                 </a:srgbClr>
@@ -5058,14 +4970,6 @@
             </a:gsLst>
             <a:lin ang="5400000"/>
           </a:gradFill>
-          <a:effectLst>
-            <a:softEdge rad="25400"/>
-            <a:outerShdw blurRad="63500" dist="0" dir="0" algn="ctr" rotWithShape="0">
-              <a:srgbClr val="000000">
-                <a:alpha val="15000"/>
-              </a:srgbClr>
-            </a:outerShdw>
-          </a:effectLst>
         </p:spPr>
         <p:style>
           <a:lnRef idx="1">
@@ -5097,8 +5001,8 @@
         </p:nvSpPr>
         <p:spPr>
           <a:xfrm>
-            <a:off x="6565392" y="2999232"/>
-            <a:ext cx="768096" cy="768096"/>
+            <a:off x="6492240" y="3108960"/>
+            <a:ext cx="731520" cy="731520"/>
           </a:xfrm>
           <a:prstGeom prst="ellipse">
             <a:avLst/>
@@ -5142,8 +5046,8 @@
         </p:nvSpPr>
         <p:spPr>
           <a:xfrm>
-            <a:off x="6729984" y="3163824"/>
-            <a:ext cx="438912" cy="438912"/>
+            <a:off x="6656832" y="3273552"/>
+            <a:ext cx="402336" cy="402336"/>
           </a:xfrm>
           <a:prstGeom prst="ellipse">
             <a:avLst/>
@@ -5185,8 +5089,8 @@
         </p:nvSpPr>
         <p:spPr>
           <a:xfrm>
-            <a:off x="6821424" y="3255264"/>
-            <a:ext cx="256032" cy="256032"/>
+            <a:off x="6748272" y="3364992"/>
+            <a:ext cx="219456" cy="219456"/>
           </a:xfrm>
           <a:prstGeom prst="ellipse">
             <a:avLst/>
@@ -5228,7 +5132,7 @@
         </p:nvSpPr>
         <p:spPr>
           <a:xfrm>
-            <a:off x="3291840" y="502920"/>
+            <a:off x="3200400" y="548640"/>
             <a:ext cx="5486400" cy="1371600"/>
           </a:xfrm>
           <a:prstGeom prst="rect">
@@ -5243,7 +5147,7 @@
           <a:lstStyle/>
           <a:p>
             <a:pPr>
-              <a:defRPr sz="5600" b="1">
+              <a:defRPr sz="5400" b="1">
                 <a:solidFill>
                   <a:srgbClr val="162314"/>
                 </a:solidFill>
@@ -5264,7 +5168,7 @@
         <p:spPr>
           <a:xfrm>
             <a:off x="8961120" y="777240"/>
-            <a:ext cx="621792" cy="621792"/>
+            <a:ext cx="594360" cy="594360"/>
           </a:xfrm>
           <a:prstGeom prst="roundRect">
             <a:avLst/>
@@ -5534,9 +5438,18 @@
   <p:clrMapOvr>
     <a:masterClrMapping/>
   </p:clrMapOvr>
-  <p:transition spd="med" advClick="1">
-    <p:morph option="byObject"/>
-  </p:transition>
+  <mc:AlternateContent xmlns:mc="http://schemas.openxmlformats.org/markup-compatibility/2006">
+    <mc:Choice xmlns:p159="http://schemas.microsoft.com/office/powerpoint/2015/09/main" Requires="p159">
+      <p:transition spd="med" advClick="1">
+        <p159:morph option="byObject"/>
+      </p:transition>
+    </mc:Choice>
+    <mc:Fallback>
+      <p:transition spd="med" advClick="1">
+        <p:fade/>
+      </p:transition>
+    </mc:Fallback>
+  </mc:AlternateContent>
 </p:sld>
 </file>
 

--- a/knowledge/Productivity/Fan_Native_Master.pptx
+++ b/knowledge/Productivity/Fan_Native_Master.pptx
@@ -3091,7 +3091,7 @@
       <p:grpSpPr/>
       <p:pic>
         <p:nvPicPr>
-          <p:cNvPr id="2" name="Picture 1" descr="courtyard_native_master_bg.jpg"/>
+          <p:cNvPr id="2" name="Picture 1" descr="courtyard_master_bg.jpg"/>
           <p:cNvPicPr>
             <a:picLocks noChangeAspect="1"/>
           </p:cNvPicPr>
@@ -3165,15 +3165,15 @@
           <p:nvPr/>
         </p:nvSpPr>
         <p:spPr>
-          <a:xfrm rot="17970000">
-            <a:off x="6858000" y="3456432"/>
-            <a:ext cx="4114800" cy="36576"/>
+          <a:xfrm rot="14265000">
+            <a:off x="8046720" y="5010912"/>
+            <a:ext cx="4937760" cy="36576"/>
           </a:xfrm>
           <a:prstGeom prst="rect">
             <a:avLst/>
           </a:prstGeom>
           <a:solidFill>
-            <a:srgbClr val="96784B"/>
+            <a:srgbClr val="A08255"/>
           </a:solidFill>
           <a:ln>
             <a:noFill/>
@@ -3208,15 +3208,15 @@
           <p:nvPr/>
         </p:nvSpPr>
         <p:spPr>
-          <a:xfrm rot="17970000">
-            <a:off x="6858000" y="3456432"/>
-            <a:ext cx="4114800" cy="36576"/>
+          <a:xfrm rot="14265000">
+            <a:off x="8046720" y="5010912"/>
+            <a:ext cx="4937760" cy="36576"/>
           </a:xfrm>
           <a:prstGeom prst="rect">
             <a:avLst/>
           </a:prstGeom>
           <a:solidFill>
-            <a:srgbClr val="96784B"/>
+            <a:srgbClr val="A08255"/>
           </a:solidFill>
           <a:ln>
             <a:noFill/>
@@ -3251,15 +3251,15 @@
           <p:nvPr/>
         </p:nvSpPr>
         <p:spPr>
-          <a:xfrm rot="17970000">
-            <a:off x="6858000" y="3456432"/>
-            <a:ext cx="4114800" cy="36576"/>
+          <a:xfrm rot="14265000">
+            <a:off x="8046720" y="5010912"/>
+            <a:ext cx="4937760" cy="36576"/>
           </a:xfrm>
           <a:prstGeom prst="rect">
             <a:avLst/>
           </a:prstGeom>
           <a:solidFill>
-            <a:srgbClr val="96784B"/>
+            <a:srgbClr val="A08255"/>
           </a:solidFill>
           <a:ln>
             <a:noFill/>
@@ -3294,15 +3294,15 @@
           <p:nvPr/>
         </p:nvSpPr>
         <p:spPr>
-          <a:xfrm rot="17970000">
-            <a:off x="6858000" y="3456432"/>
-            <a:ext cx="4114800" cy="36576"/>
+          <a:xfrm rot="14265000">
+            <a:off x="8046720" y="5010912"/>
+            <a:ext cx="4937760" cy="36576"/>
           </a:xfrm>
           <a:prstGeom prst="rect">
             <a:avLst/>
           </a:prstGeom>
           <a:solidFill>
-            <a:srgbClr val="96784B"/>
+            <a:srgbClr val="A08255"/>
           </a:solidFill>
           <a:ln>
             <a:noFill/>
@@ -3337,15 +3337,15 @@
           <p:nvPr/>
         </p:nvSpPr>
         <p:spPr>
-          <a:xfrm rot="17970000">
-            <a:off x="6858000" y="3456432"/>
-            <a:ext cx="4114800" cy="36576"/>
+          <a:xfrm rot="14265000">
+            <a:off x="8046720" y="5010912"/>
+            <a:ext cx="4937760" cy="36576"/>
           </a:xfrm>
           <a:prstGeom prst="rect">
             <a:avLst/>
           </a:prstGeom>
           <a:solidFill>
-            <a:srgbClr val="96784B"/>
+            <a:srgbClr val="A08255"/>
           </a:solidFill>
           <a:ln>
             <a:noFill/>
@@ -3380,15 +3380,15 @@
           <p:nvPr/>
         </p:nvSpPr>
         <p:spPr>
-          <a:xfrm rot="17970000">
-            <a:off x="6858000" y="3456432"/>
-            <a:ext cx="4114800" cy="36576"/>
+          <a:xfrm rot="14265000">
+            <a:off x="8046720" y="5010912"/>
+            <a:ext cx="4937760" cy="36576"/>
           </a:xfrm>
           <a:prstGeom prst="rect">
             <a:avLst/>
           </a:prstGeom>
           <a:solidFill>
-            <a:srgbClr val="96784B"/>
+            <a:srgbClr val="A08255"/>
           </a:solidFill>
           <a:ln>
             <a:noFill/>
@@ -3423,20 +3423,20 @@
           <p:nvPr/>
         </p:nvSpPr>
         <p:spPr>
-          <a:xfrm rot="17160000">
-            <a:off x="2743200" y="-640080"/>
-            <a:ext cx="8229600" cy="8229600"/>
+          <a:xfrm rot="13500000">
+            <a:off x="3108960" y="91440"/>
+            <a:ext cx="9875520" cy="9875520"/>
           </a:xfrm>
           <a:prstGeom prst="blockArc">
             <a:avLst>
               <a:gd name="adj1" fmla="val 0"/>
-              <a:gd name="adj2" fmla="val 2700000"/>
-              <a:gd name="adj3" fmla="val 32000"/>
+              <a:gd name="adj2" fmla="val 2550000"/>
+              <a:gd name="adj3" fmla="val 30000"/>
             </a:avLst>
           </a:prstGeom>
           <a:ln w="9525">
             <a:solidFill>
-              <a:srgbClr val="D2B478"/>
+              <a:srgbClr val="D7B97D"/>
             </a:solidFill>
           </a:ln>
           <a:gradFill flip="none" rotWithShape="1">
@@ -3459,6 +3459,14 @@
             </a:gsLst>
             <a:lin ang="5400000"/>
           </a:gradFill>
+          <a:effectLst>
+            <a:softEdge rad="25400"/>
+            <a:outerShdw blurRad="63500" dist="0" dir="0" algn="ctr" rotWithShape="0">
+              <a:srgbClr val="000000">
+                <a:alpha val="15000"/>
+              </a:srgbClr>
+            </a:outerShdw>
+          </a:effectLst>
         </p:spPr>
         <p:style>
           <a:lnRef idx="1">
@@ -3489,20 +3497,20 @@
           <p:nvPr/>
         </p:nvSpPr>
         <p:spPr>
-          <a:xfrm rot="17160000">
-            <a:off x="2743200" y="-640080"/>
-            <a:ext cx="8229600" cy="8229600"/>
+          <a:xfrm rot="13500000">
+            <a:off x="3108960" y="91440"/>
+            <a:ext cx="9875520" cy="9875520"/>
           </a:xfrm>
           <a:prstGeom prst="blockArc">
             <a:avLst>
               <a:gd name="adj1" fmla="val 0"/>
-              <a:gd name="adj2" fmla="val 2700000"/>
-              <a:gd name="adj3" fmla="val 32000"/>
+              <a:gd name="adj2" fmla="val 2550000"/>
+              <a:gd name="adj3" fmla="val 30000"/>
             </a:avLst>
           </a:prstGeom>
           <a:ln w="9525">
             <a:solidFill>
-              <a:srgbClr val="D2B478"/>
+              <a:srgbClr val="D7B97D"/>
             </a:solidFill>
           </a:ln>
           <a:gradFill flip="none" rotWithShape="1">
@@ -3525,6 +3533,14 @@
             </a:gsLst>
             <a:lin ang="5400000"/>
           </a:gradFill>
+          <a:effectLst>
+            <a:softEdge rad="25400"/>
+            <a:outerShdw blurRad="63500" dist="0" dir="0" algn="ctr" rotWithShape="0">
+              <a:srgbClr val="000000">
+                <a:alpha val="15000"/>
+              </a:srgbClr>
+            </a:outerShdw>
+          </a:effectLst>
         </p:spPr>
         <p:style>
           <a:lnRef idx="1">
@@ -3555,20 +3571,20 @@
           <p:nvPr/>
         </p:nvSpPr>
         <p:spPr>
-          <a:xfrm rot="17160000">
-            <a:off x="2743200" y="-640080"/>
-            <a:ext cx="8229600" cy="8229600"/>
+          <a:xfrm rot="13500000">
+            <a:off x="3108960" y="91440"/>
+            <a:ext cx="9875520" cy="9875520"/>
           </a:xfrm>
           <a:prstGeom prst="blockArc">
             <a:avLst>
               <a:gd name="adj1" fmla="val 0"/>
-              <a:gd name="adj2" fmla="val 2700000"/>
-              <a:gd name="adj3" fmla="val 32000"/>
+              <a:gd name="adj2" fmla="val 2550000"/>
+              <a:gd name="adj3" fmla="val 30000"/>
             </a:avLst>
           </a:prstGeom>
           <a:ln w="9525">
             <a:solidFill>
-              <a:srgbClr val="D2B478"/>
+              <a:srgbClr val="D7B97D"/>
             </a:solidFill>
           </a:ln>
           <a:gradFill flip="none" rotWithShape="1">
@@ -3591,6 +3607,14 @@
             </a:gsLst>
             <a:lin ang="5400000"/>
           </a:gradFill>
+          <a:effectLst>
+            <a:softEdge rad="25400"/>
+            <a:outerShdw blurRad="63500" dist="0" dir="0" algn="ctr" rotWithShape="0">
+              <a:srgbClr val="000000">
+                <a:alpha val="15000"/>
+              </a:srgbClr>
+            </a:outerShdw>
+          </a:effectLst>
         </p:spPr>
         <p:style>
           <a:lnRef idx="1">
@@ -3621,20 +3645,20 @@
           <p:nvPr/>
         </p:nvSpPr>
         <p:spPr>
-          <a:xfrm rot="17160000">
-            <a:off x="2743200" y="-640080"/>
-            <a:ext cx="8229600" cy="8229600"/>
+          <a:xfrm rot="13500000">
+            <a:off x="3108960" y="91440"/>
+            <a:ext cx="9875520" cy="9875520"/>
           </a:xfrm>
           <a:prstGeom prst="blockArc">
             <a:avLst>
               <a:gd name="adj1" fmla="val 0"/>
-              <a:gd name="adj2" fmla="val 2700000"/>
-              <a:gd name="adj3" fmla="val 32000"/>
+              <a:gd name="adj2" fmla="val 2550000"/>
+              <a:gd name="adj3" fmla="val 30000"/>
             </a:avLst>
           </a:prstGeom>
           <a:ln w="9525">
             <a:solidFill>
-              <a:srgbClr val="D2B478"/>
+              <a:srgbClr val="D7B97D"/>
             </a:solidFill>
           </a:ln>
           <a:gradFill flip="none" rotWithShape="1">
@@ -3657,6 +3681,14 @@
             </a:gsLst>
             <a:lin ang="5400000"/>
           </a:gradFill>
+          <a:effectLst>
+            <a:softEdge rad="25400"/>
+            <a:outerShdw blurRad="63500" dist="0" dir="0" algn="ctr" rotWithShape="0">
+              <a:srgbClr val="000000">
+                <a:alpha val="15000"/>
+              </a:srgbClr>
+            </a:outerShdw>
+          </a:effectLst>
         </p:spPr>
         <p:style>
           <a:lnRef idx="1">
@@ -3687,20 +3719,20 @@
           <p:nvPr/>
         </p:nvSpPr>
         <p:spPr>
-          <a:xfrm rot="17160000">
-            <a:off x="2743200" y="-640080"/>
-            <a:ext cx="8229600" cy="8229600"/>
+          <a:xfrm rot="13500000">
+            <a:off x="3108960" y="91440"/>
+            <a:ext cx="9875520" cy="9875520"/>
           </a:xfrm>
           <a:prstGeom prst="blockArc">
             <a:avLst>
               <a:gd name="adj1" fmla="val 0"/>
-              <a:gd name="adj2" fmla="val 2700000"/>
-              <a:gd name="adj3" fmla="val 32000"/>
+              <a:gd name="adj2" fmla="val 2550000"/>
+              <a:gd name="adj3" fmla="val 30000"/>
             </a:avLst>
           </a:prstGeom>
           <a:ln w="9525">
             <a:solidFill>
-              <a:srgbClr val="D2B478"/>
+              <a:srgbClr val="D7B97D"/>
             </a:solidFill>
           </a:ln>
           <a:gradFill flip="none" rotWithShape="1">
@@ -3723,6 +3755,14 @@
             </a:gsLst>
             <a:lin ang="5400000"/>
           </a:gradFill>
+          <a:effectLst>
+            <a:softEdge rad="25400"/>
+            <a:outerShdw blurRad="63500" dist="0" dir="0" algn="ctr" rotWithShape="0">
+              <a:srgbClr val="000000">
+                <a:alpha val="15000"/>
+              </a:srgbClr>
+            </a:outerShdw>
+          </a:effectLst>
         </p:spPr>
         <p:style>
           <a:lnRef idx="1">
@@ -3753,20 +3793,20 @@
           <p:nvPr/>
         </p:nvSpPr>
         <p:spPr>
-          <a:xfrm rot="17160000">
-            <a:off x="2743200" y="-640080"/>
-            <a:ext cx="8229600" cy="8229600"/>
+          <a:xfrm rot="13500000">
+            <a:off x="3108960" y="91440"/>
+            <a:ext cx="9875520" cy="9875520"/>
           </a:xfrm>
           <a:prstGeom prst="blockArc">
             <a:avLst>
               <a:gd name="adj1" fmla="val 0"/>
-              <a:gd name="adj2" fmla="val 2700000"/>
-              <a:gd name="adj3" fmla="val 32000"/>
+              <a:gd name="adj2" fmla="val 2550000"/>
+              <a:gd name="adj3" fmla="val 30000"/>
             </a:avLst>
           </a:prstGeom>
           <a:ln w="9525">
             <a:solidFill>
-              <a:srgbClr val="D2B478"/>
+              <a:srgbClr val="D7B97D"/>
             </a:solidFill>
           </a:ln>
           <a:gradFill flip="none" rotWithShape="1">
@@ -3789,6 +3829,14 @@
             </a:gsLst>
             <a:lin ang="5400000"/>
           </a:gradFill>
+          <a:effectLst>
+            <a:softEdge rad="25400"/>
+            <a:outerShdw blurRad="63500" dist="0" dir="0" algn="ctr" rotWithShape="0">
+              <a:srgbClr val="000000">
+                <a:alpha val="15000"/>
+              </a:srgbClr>
+            </a:outerShdw>
+          </a:effectLst>
         </p:spPr>
         <p:style>
           <a:lnRef idx="1">
@@ -3820,18 +3868,18 @@
         </p:nvSpPr>
         <p:spPr>
           <a:xfrm>
-            <a:off x="6492240" y="3108960"/>
-            <a:ext cx="731520" cy="731520"/>
+            <a:off x="7662672" y="4645152"/>
+            <a:ext cx="768096" cy="768096"/>
           </a:xfrm>
           <a:prstGeom prst="ellipse">
             <a:avLst/>
           </a:prstGeom>
           <a:solidFill>
-            <a:srgbClr val="F0F8F0"/>
+            <a:srgbClr val="F2F8F2"/>
           </a:solidFill>
           <a:ln w="19050">
             <a:solidFill>
-              <a:srgbClr val="D2B478"/>
+              <a:srgbClr val="D7B97D"/>
             </a:solidFill>
           </a:ln>
         </p:spPr>
@@ -3865,14 +3913,14 @@
         </p:nvSpPr>
         <p:spPr>
           <a:xfrm>
-            <a:off x="6656832" y="3273552"/>
-            <a:ext cx="402336" cy="402336"/>
+            <a:off x="7827264" y="4809744"/>
+            <a:ext cx="438912" cy="438912"/>
           </a:xfrm>
           <a:prstGeom prst="ellipse">
             <a:avLst/>
           </a:prstGeom>
           <a:solidFill>
-            <a:srgbClr val="C8A564"/>
+            <a:srgbClr val="CDAA69"/>
           </a:solidFill>
           <a:ln>
             <a:noFill/>
@@ -3908,14 +3956,14 @@
         </p:nvSpPr>
         <p:spPr>
           <a:xfrm>
-            <a:off x="6748272" y="3364992"/>
-            <a:ext cx="219456" cy="219456"/>
+            <a:off x="7927848" y="4910328"/>
+            <a:ext cx="237744" cy="237744"/>
           </a:xfrm>
           <a:prstGeom prst="ellipse">
             <a:avLst/>
           </a:prstGeom>
           <a:solidFill>
-            <a:srgbClr val="23341E"/>
+            <a:srgbClr val="22321C"/>
           </a:solidFill>
           <a:ln>
             <a:noFill/>
@@ -3951,8 +3999,8 @@
         </p:nvSpPr>
         <p:spPr>
           <a:xfrm>
-            <a:off x="3200400" y="-2286000"/>
-            <a:ext cx="5486400" cy="1371600"/>
+            <a:off x="3474720" y="-2377440"/>
+            <a:ext cx="5303520" cy="1371600"/>
           </a:xfrm>
           <a:prstGeom prst="rect">
             <a:avLst/>
@@ -3966,9 +4014,9 @@
           <a:lstStyle/>
           <a:p>
             <a:pPr>
-              <a:defRPr sz="5400" b="1">
+              <a:defRPr sz="5600" b="1">
                 <a:solidFill>
-                  <a:srgbClr val="162314"/>
+                  <a:srgbClr val="142012"/>
                 </a:solidFill>
               </a:defRPr>
             </a:pPr>
@@ -3986,18 +4034,18 @@
         </p:nvSpPr>
         <p:spPr>
           <a:xfrm>
-            <a:off x="8961120" y="-2011680"/>
-            <a:ext cx="594360" cy="594360"/>
+            <a:off x="8961120" y="-2103120"/>
+            <a:ext cx="621792" cy="621792"/>
           </a:xfrm>
           <a:prstGeom prst="roundRect">
             <a:avLst/>
           </a:prstGeom>
           <a:solidFill>
-            <a:srgbClr val="A52A26"/>
+            <a:srgbClr val="A82824"/>
           </a:solidFill>
           <a:ln w="12700">
             <a:solidFill>
-              <a:srgbClr val="DCB482"/>
+              <a:srgbClr val="DCB982"/>
             </a:solidFill>
           </a:ln>
         </p:spPr>
@@ -4040,7 +4088,7 @@
         </p:nvSpPr>
         <p:spPr>
           <a:xfrm>
-            <a:off x="12801600" y="1920240"/>
+            <a:off x="12801600" y="2011680"/>
             <a:ext cx="347472" cy="3291840"/>
           </a:xfrm>
           <a:prstGeom prst="rect">
@@ -4057,24 +4105,24 @@
             <a:pPr algn="ctr">
               <a:defRPr sz="1500">
                 <a:solidFill>
-                  <a:srgbClr val="3A5034"/>
+                  <a:srgbClr val="384E32"/>
                 </a:solidFill>
               </a:defRPr>
             </a:pPr>
             <a:r>
-              <a:t>昨</a:t>
+              <a:t>寒</a:t>
             </a:r>
             <a:br/>
             <a:r>
-              <a:t>夜</a:t>
+              <a:t>蝉</a:t>
             </a:r>
             <a:br/>
             <a:r>
-              <a:t>疏</a:t>
+              <a:t>凄</a:t>
             </a:r>
             <a:br/>
             <a:r>
-              <a:t>风</a:t>
+              <a:t>切</a:t>
             </a:r>
             <a:br/>
             <a:r>
@@ -4083,6 +4131,10 @@
             <a:br/>
             <a:r>
               <a:t>雨</a:t>
+            </a:r>
+            <a:br/>
+            <a:r>
+              <a:t>歇</a:t>
             </a:r>
           </a:p>
         </p:txBody>
@@ -4095,7 +4147,7 @@
         </p:nvSpPr>
         <p:spPr>
           <a:xfrm>
-            <a:off x="13258800" y="1920240"/>
+            <a:off x="13258800" y="2011680"/>
             <a:ext cx="347472" cy="3291840"/>
           </a:xfrm>
           <a:prstGeom prst="rect">
@@ -4112,32 +4164,36 @@
             <a:pPr algn="ctr">
               <a:defRPr sz="1500">
                 <a:solidFill>
-                  <a:srgbClr val="3A5034"/>
+                  <a:srgbClr val="384E32"/>
                 </a:solidFill>
               </a:defRPr>
             </a:pPr>
             <a:r>
-              <a:t>浓</a:t>
+              <a:t>多</a:t>
             </a:r>
             <a:br/>
             <a:r>
-              <a:t>睡</a:t>
+              <a:t>情</a:t>
             </a:r>
             <a:br/>
             <a:r>
-              <a:t>不</a:t>
+              <a:t>自</a:t>
             </a:r>
             <a:br/>
             <a:r>
-              <a:t>消</a:t>
+              <a:t>古</a:t>
             </a:r>
             <a:br/>
             <a:r>
-              <a:t>残</a:t>
+              <a:t>伤</a:t>
             </a:r>
             <a:br/>
             <a:r>
-              <a:t>酒</a:t>
+              <a:t>离</a:t>
+            </a:r>
+            <a:br/>
+            <a:r>
+              <a:t>别</a:t>
             </a:r>
           </a:p>
         </p:txBody>
@@ -4150,7 +4206,7 @@
         </p:nvSpPr>
         <p:spPr>
           <a:xfrm>
-            <a:off x="13716000" y="1920240"/>
+            <a:off x="13716000" y="2011680"/>
             <a:ext cx="347472" cy="3291840"/>
           </a:xfrm>
           <a:prstGeom prst="rect">
@@ -4167,32 +4223,36 @@
             <a:pPr algn="ctr">
               <a:defRPr sz="1500">
                 <a:solidFill>
-                  <a:srgbClr val="3A5034"/>
+                  <a:srgbClr val="384E32"/>
                 </a:solidFill>
               </a:defRPr>
             </a:pPr>
             <a:r>
-              <a:t>试</a:t>
+              <a:t>今</a:t>
             </a:r>
             <a:br/>
             <a:r>
-              <a:t>问</a:t>
+              <a:t>宵</a:t>
             </a:r>
             <a:br/>
             <a:r>
-              <a:t>卷</a:t>
+              <a:t>酒</a:t>
             </a:r>
             <a:br/>
             <a:r>
-              <a:t>帘</a:t>
+              <a:t>醒</a:t>
             </a:r>
             <a:br/>
             <a:r>
-              <a:t>之</a:t>
+              <a:t>杨</a:t>
             </a:r>
             <a:br/>
             <a:r>
-              <a:t>人</a:t>
+              <a:t>柳</a:t>
+            </a:r>
+            <a:br/>
+            <a:r>
+              <a:t>岸</a:t>
             </a:r>
           </a:p>
         </p:txBody>
@@ -4205,7 +4265,7 @@
         </p:nvSpPr>
         <p:spPr>
           <a:xfrm>
-            <a:off x="14173200" y="1920240"/>
+            <a:off x="14173200" y="2011680"/>
             <a:ext cx="347472" cy="3291840"/>
           </a:xfrm>
           <a:prstGeom prst="rect">
@@ -4222,32 +4282,36 @@
             <a:pPr algn="ctr">
               <a:defRPr sz="1500">
                 <a:solidFill>
-                  <a:srgbClr val="3A5034"/>
+                  <a:srgbClr val="384E32"/>
                 </a:solidFill>
               </a:defRPr>
             </a:pPr>
             <a:r>
-              <a:t>却</a:t>
+              <a:t>便</a:t>
             </a:r>
             <a:br/>
             <a:r>
-              <a:t>道</a:t>
+              <a:t>纵</a:t>
             </a:r>
             <a:br/>
             <a:r>
-              <a:t>海</a:t>
+              <a:t>风</a:t>
             </a:r>
             <a:br/>
             <a:r>
-              <a:t>棠</a:t>
+              <a:t>情</a:t>
             </a:r>
             <a:br/>
             <a:r>
-              <a:t>依</a:t>
+              <a:t>更</a:t>
             </a:r>
             <a:br/>
             <a:r>
-              <a:t>旧</a:t>
+              <a:t>与</a:t>
+            </a:r>
+            <a:br/>
+            <a:r>
+              <a:t>谁</a:t>
             </a:r>
           </a:p>
         </p:txBody>
@@ -4272,7 +4336,7 @@
       <p:grpSpPr/>
       <p:pic>
         <p:nvPicPr>
-          <p:cNvPr id="2" name="Picture 1" descr="courtyard_native_master_bg.jpg"/>
+          <p:cNvPr id="2" name="Picture 1" descr="courtyard_master_bg.jpg"/>
           <p:cNvPicPr>
             <a:picLocks noChangeAspect="1"/>
           </p:cNvPicPr>
@@ -4346,15 +4410,15 @@
           <p:nvPr/>
         </p:nvSpPr>
         <p:spPr>
-          <a:xfrm rot="17970000">
-            <a:off x="6858000" y="3456432"/>
-            <a:ext cx="4114800" cy="36576"/>
+          <a:xfrm rot="14265000">
+            <a:off x="8046720" y="5010912"/>
+            <a:ext cx="4937760" cy="36576"/>
           </a:xfrm>
           <a:prstGeom prst="rect">
             <a:avLst/>
           </a:prstGeom>
           <a:solidFill>
-            <a:srgbClr val="96784B"/>
+            <a:srgbClr val="A08255"/>
           </a:solidFill>
           <a:ln>
             <a:noFill/>
@@ -4389,15 +4453,15 @@
           <p:nvPr/>
         </p:nvSpPr>
         <p:spPr>
-          <a:xfrm rot="19740000">
-            <a:off x="6858000" y="3456432"/>
-            <a:ext cx="4114800" cy="36576"/>
+          <a:xfrm rot="15975000">
+            <a:off x="8046720" y="5010912"/>
+            <a:ext cx="4937760" cy="36576"/>
           </a:xfrm>
           <a:prstGeom prst="rect">
             <a:avLst/>
           </a:prstGeom>
           <a:solidFill>
-            <a:srgbClr val="96784B"/>
+            <a:srgbClr val="A08255"/>
           </a:solidFill>
           <a:ln>
             <a:noFill/>
@@ -4432,15 +4496,15 @@
           <p:nvPr/>
         </p:nvSpPr>
         <p:spPr>
-          <a:xfrm rot="21510000">
-            <a:off x="6858000" y="3456432"/>
-            <a:ext cx="4114800" cy="36576"/>
+          <a:xfrm rot="17685000">
+            <a:off x="8046720" y="5010912"/>
+            <a:ext cx="4937760" cy="36576"/>
           </a:xfrm>
           <a:prstGeom prst="rect">
             <a:avLst/>
           </a:prstGeom>
           <a:solidFill>
-            <a:srgbClr val="96784B"/>
+            <a:srgbClr val="A08255"/>
           </a:solidFill>
           <a:ln>
             <a:noFill/>
@@ -4475,15 +4539,15 @@
           <p:nvPr/>
         </p:nvSpPr>
         <p:spPr>
-          <a:xfrm rot="1680000">
-            <a:off x="6858000" y="3456432"/>
-            <a:ext cx="4114800" cy="36576"/>
+          <a:xfrm rot="19395000">
+            <a:off x="8046720" y="5010912"/>
+            <a:ext cx="4937760" cy="36576"/>
           </a:xfrm>
           <a:prstGeom prst="rect">
             <a:avLst/>
           </a:prstGeom>
           <a:solidFill>
-            <a:srgbClr val="96784B"/>
+            <a:srgbClr val="A08255"/>
           </a:solidFill>
           <a:ln>
             <a:noFill/>
@@ -4518,15 +4582,15 @@
           <p:nvPr/>
         </p:nvSpPr>
         <p:spPr>
-          <a:xfrm rot="3450000">
-            <a:off x="6858000" y="3456432"/>
-            <a:ext cx="4114800" cy="36576"/>
+          <a:xfrm rot="21105000">
+            <a:off x="8046720" y="5010912"/>
+            <a:ext cx="4937760" cy="36576"/>
           </a:xfrm>
           <a:prstGeom prst="rect">
             <a:avLst/>
           </a:prstGeom>
           <a:solidFill>
-            <a:srgbClr val="96784B"/>
+            <a:srgbClr val="A08255"/>
           </a:solidFill>
           <a:ln>
             <a:noFill/>
@@ -4561,15 +4625,15 @@
           <p:nvPr/>
         </p:nvSpPr>
         <p:spPr>
-          <a:xfrm rot="5220000">
-            <a:off x="6858000" y="3456432"/>
-            <a:ext cx="4114800" cy="36576"/>
+          <a:xfrm rot="1215000">
+            <a:off x="8046720" y="5010912"/>
+            <a:ext cx="4937760" cy="36576"/>
           </a:xfrm>
           <a:prstGeom prst="rect">
             <a:avLst/>
           </a:prstGeom>
           <a:solidFill>
-            <a:srgbClr val="96784B"/>
+            <a:srgbClr val="A08255"/>
           </a:solidFill>
           <a:ln>
             <a:noFill/>
@@ -4604,20 +4668,20 @@
           <p:nvPr/>
         </p:nvSpPr>
         <p:spPr>
-          <a:xfrm rot="17160000">
-            <a:off x="2743200" y="-640080"/>
-            <a:ext cx="8229600" cy="8229600"/>
+          <a:xfrm rot="13500000">
+            <a:off x="3108960" y="91440"/>
+            <a:ext cx="9875520" cy="9875520"/>
           </a:xfrm>
           <a:prstGeom prst="blockArc">
             <a:avLst>
               <a:gd name="adj1" fmla="val 0"/>
-              <a:gd name="adj2" fmla="val 2700000"/>
-              <a:gd name="adj3" fmla="val 32000"/>
+              <a:gd name="adj2" fmla="val 2550000"/>
+              <a:gd name="adj3" fmla="val 30000"/>
             </a:avLst>
           </a:prstGeom>
           <a:ln w="9525">
             <a:solidFill>
-              <a:srgbClr val="D2B478"/>
+              <a:srgbClr val="D7B97D"/>
             </a:solidFill>
           </a:ln>
           <a:gradFill flip="none" rotWithShape="1">
@@ -4640,6 +4704,14 @@
             </a:gsLst>
             <a:lin ang="5400000"/>
           </a:gradFill>
+          <a:effectLst>
+            <a:softEdge rad="25400"/>
+            <a:outerShdw blurRad="63500" dist="0" dir="0" algn="ctr" rotWithShape="0">
+              <a:srgbClr val="000000">
+                <a:alpha val="15000"/>
+              </a:srgbClr>
+            </a:outerShdw>
+          </a:effectLst>
         </p:spPr>
         <p:style>
           <a:lnRef idx="1">
@@ -4670,20 +4742,20 @@
           <p:nvPr/>
         </p:nvSpPr>
         <p:spPr>
-          <a:xfrm rot="18930000">
-            <a:off x="2743200" y="-640080"/>
-            <a:ext cx="8229600" cy="8229600"/>
+          <a:xfrm rot="15210000">
+            <a:off x="3108960" y="91440"/>
+            <a:ext cx="9875520" cy="9875520"/>
           </a:xfrm>
           <a:prstGeom prst="blockArc">
             <a:avLst>
               <a:gd name="adj1" fmla="val 0"/>
-              <a:gd name="adj2" fmla="val 2700000"/>
-              <a:gd name="adj3" fmla="val 32000"/>
+              <a:gd name="adj2" fmla="val 2550000"/>
+              <a:gd name="adj3" fmla="val 30000"/>
             </a:avLst>
           </a:prstGeom>
           <a:ln w="9525">
             <a:solidFill>
-              <a:srgbClr val="D2B478"/>
+              <a:srgbClr val="D7B97D"/>
             </a:solidFill>
           </a:ln>
           <a:gradFill flip="none" rotWithShape="1">
@@ -4706,6 +4778,14 @@
             </a:gsLst>
             <a:lin ang="5400000"/>
           </a:gradFill>
+          <a:effectLst>
+            <a:softEdge rad="25400"/>
+            <a:outerShdw blurRad="63500" dist="0" dir="0" algn="ctr" rotWithShape="0">
+              <a:srgbClr val="000000">
+                <a:alpha val="15000"/>
+              </a:srgbClr>
+            </a:outerShdw>
+          </a:effectLst>
         </p:spPr>
         <p:style>
           <a:lnRef idx="1">
@@ -4736,20 +4816,20 @@
           <p:nvPr/>
         </p:nvSpPr>
         <p:spPr>
-          <a:xfrm rot="20700000">
-            <a:off x="2743200" y="-640080"/>
-            <a:ext cx="8229600" cy="8229600"/>
+          <a:xfrm rot="16920000">
+            <a:off x="3108960" y="91440"/>
+            <a:ext cx="9875520" cy="9875520"/>
           </a:xfrm>
           <a:prstGeom prst="blockArc">
             <a:avLst>
               <a:gd name="adj1" fmla="val 0"/>
-              <a:gd name="adj2" fmla="val 2700000"/>
-              <a:gd name="adj3" fmla="val 32000"/>
+              <a:gd name="adj2" fmla="val 2550000"/>
+              <a:gd name="adj3" fmla="val 30000"/>
             </a:avLst>
           </a:prstGeom>
           <a:ln w="9525">
             <a:solidFill>
-              <a:srgbClr val="D2B478"/>
+              <a:srgbClr val="D7B97D"/>
             </a:solidFill>
           </a:ln>
           <a:gradFill flip="none" rotWithShape="1">
@@ -4772,6 +4852,14 @@
             </a:gsLst>
             <a:lin ang="5400000"/>
           </a:gradFill>
+          <a:effectLst>
+            <a:softEdge rad="25400"/>
+            <a:outerShdw blurRad="63500" dist="0" dir="0" algn="ctr" rotWithShape="0">
+              <a:srgbClr val="000000">
+                <a:alpha val="15000"/>
+              </a:srgbClr>
+            </a:outerShdw>
+          </a:effectLst>
         </p:spPr>
         <p:style>
           <a:lnRef idx="1">
@@ -4802,20 +4890,20 @@
           <p:nvPr/>
         </p:nvSpPr>
         <p:spPr>
-          <a:xfrm rot="870000">
-            <a:off x="2743200" y="-640080"/>
-            <a:ext cx="8229600" cy="8229600"/>
+          <a:xfrm rot="18630000">
+            <a:off x="3108960" y="91440"/>
+            <a:ext cx="9875520" cy="9875520"/>
           </a:xfrm>
           <a:prstGeom prst="blockArc">
             <a:avLst>
               <a:gd name="adj1" fmla="val 0"/>
-              <a:gd name="adj2" fmla="val 2700000"/>
-              <a:gd name="adj3" fmla="val 32000"/>
+              <a:gd name="adj2" fmla="val 2550000"/>
+              <a:gd name="adj3" fmla="val 30000"/>
             </a:avLst>
           </a:prstGeom>
           <a:ln w="9525">
             <a:solidFill>
-              <a:srgbClr val="D2B478"/>
+              <a:srgbClr val="D7B97D"/>
             </a:solidFill>
           </a:ln>
           <a:gradFill flip="none" rotWithShape="1">
@@ -4838,6 +4926,14 @@
             </a:gsLst>
             <a:lin ang="5400000"/>
           </a:gradFill>
+          <a:effectLst>
+            <a:softEdge rad="25400"/>
+            <a:outerShdw blurRad="63500" dist="0" dir="0" algn="ctr" rotWithShape="0">
+              <a:srgbClr val="000000">
+                <a:alpha val="15000"/>
+              </a:srgbClr>
+            </a:outerShdw>
+          </a:effectLst>
         </p:spPr>
         <p:style>
           <a:lnRef idx="1">
@@ -4868,20 +4964,20 @@
           <p:nvPr/>
         </p:nvSpPr>
         <p:spPr>
-          <a:xfrm rot="2640000">
-            <a:off x="2743200" y="-640080"/>
-            <a:ext cx="8229600" cy="8229600"/>
+          <a:xfrm rot="20340000">
+            <a:off x="3108960" y="91440"/>
+            <a:ext cx="9875520" cy="9875520"/>
           </a:xfrm>
           <a:prstGeom prst="blockArc">
             <a:avLst>
               <a:gd name="adj1" fmla="val 0"/>
-              <a:gd name="adj2" fmla="val 2700000"/>
-              <a:gd name="adj3" fmla="val 32000"/>
+              <a:gd name="adj2" fmla="val 2550000"/>
+              <a:gd name="adj3" fmla="val 30000"/>
             </a:avLst>
           </a:prstGeom>
           <a:ln w="9525">
             <a:solidFill>
-              <a:srgbClr val="D2B478"/>
+              <a:srgbClr val="D7B97D"/>
             </a:solidFill>
           </a:ln>
           <a:gradFill flip="none" rotWithShape="1">
@@ -4904,6 +5000,14 @@
             </a:gsLst>
             <a:lin ang="5400000"/>
           </a:gradFill>
+          <a:effectLst>
+            <a:softEdge rad="25400"/>
+            <a:outerShdw blurRad="63500" dist="0" dir="0" algn="ctr" rotWithShape="0">
+              <a:srgbClr val="000000">
+                <a:alpha val="15000"/>
+              </a:srgbClr>
+            </a:outerShdw>
+          </a:effectLst>
         </p:spPr>
         <p:style>
           <a:lnRef idx="1">
@@ -4934,20 +5038,20 @@
           <p:nvPr/>
         </p:nvSpPr>
         <p:spPr>
-          <a:xfrm rot="4410000">
-            <a:off x="2743200" y="-640080"/>
-            <a:ext cx="8229600" cy="8229600"/>
+          <a:xfrm rot="450000">
+            <a:off x="3108960" y="91440"/>
+            <a:ext cx="9875520" cy="9875520"/>
           </a:xfrm>
           <a:prstGeom prst="blockArc">
             <a:avLst>
               <a:gd name="adj1" fmla="val 0"/>
-              <a:gd name="adj2" fmla="val 2700000"/>
-              <a:gd name="adj3" fmla="val 32000"/>
+              <a:gd name="adj2" fmla="val 2550000"/>
+              <a:gd name="adj3" fmla="val 30000"/>
             </a:avLst>
           </a:prstGeom>
           <a:ln w="9525">
             <a:solidFill>
-              <a:srgbClr val="D2B478"/>
+              <a:srgbClr val="D7B97D"/>
             </a:solidFill>
           </a:ln>
           <a:gradFill flip="none" rotWithShape="1">
@@ -4970,6 +5074,14 @@
             </a:gsLst>
             <a:lin ang="5400000"/>
           </a:gradFill>
+          <a:effectLst>
+            <a:softEdge rad="25400"/>
+            <a:outerShdw blurRad="63500" dist="0" dir="0" algn="ctr" rotWithShape="0">
+              <a:srgbClr val="000000">
+                <a:alpha val="15000"/>
+              </a:srgbClr>
+            </a:outerShdw>
+          </a:effectLst>
         </p:spPr>
         <p:style>
           <a:lnRef idx="1">
@@ -5001,18 +5113,18 @@
         </p:nvSpPr>
         <p:spPr>
           <a:xfrm>
-            <a:off x="6492240" y="3108960"/>
-            <a:ext cx="731520" cy="731520"/>
+            <a:off x="7662672" y="4645152"/>
+            <a:ext cx="768096" cy="768096"/>
           </a:xfrm>
           <a:prstGeom prst="ellipse">
             <a:avLst/>
           </a:prstGeom>
           <a:solidFill>
-            <a:srgbClr val="F0F8F0"/>
+            <a:srgbClr val="F2F8F2"/>
           </a:solidFill>
           <a:ln w="19050">
             <a:solidFill>
-              <a:srgbClr val="D2B478"/>
+              <a:srgbClr val="D7B97D"/>
             </a:solidFill>
           </a:ln>
         </p:spPr>
@@ -5046,14 +5158,14 @@
         </p:nvSpPr>
         <p:spPr>
           <a:xfrm>
-            <a:off x="6656832" y="3273552"/>
-            <a:ext cx="402336" cy="402336"/>
+            <a:off x="7827264" y="4809744"/>
+            <a:ext cx="438912" cy="438912"/>
           </a:xfrm>
           <a:prstGeom prst="ellipse">
             <a:avLst/>
           </a:prstGeom>
           <a:solidFill>
-            <a:srgbClr val="C8A564"/>
+            <a:srgbClr val="CDAA69"/>
           </a:solidFill>
           <a:ln>
             <a:noFill/>
@@ -5089,14 +5201,14 @@
         </p:nvSpPr>
         <p:spPr>
           <a:xfrm>
-            <a:off x="6748272" y="3364992"/>
-            <a:ext cx="219456" cy="219456"/>
+            <a:off x="7927848" y="4910328"/>
+            <a:ext cx="237744" cy="237744"/>
           </a:xfrm>
           <a:prstGeom prst="ellipse">
             <a:avLst/>
           </a:prstGeom>
           <a:solidFill>
-            <a:srgbClr val="23341E"/>
+            <a:srgbClr val="22321C"/>
           </a:solidFill>
           <a:ln>
             <a:noFill/>
@@ -5132,8 +5244,8 @@
         </p:nvSpPr>
         <p:spPr>
           <a:xfrm>
-            <a:off x="3200400" y="548640"/>
-            <a:ext cx="5486400" cy="1371600"/>
+            <a:off x="3474720" y="594360"/>
+            <a:ext cx="5303520" cy="1371600"/>
           </a:xfrm>
           <a:prstGeom prst="rect">
             <a:avLst/>
@@ -5147,9 +5259,9 @@
           <a:lstStyle/>
           <a:p>
             <a:pPr>
-              <a:defRPr sz="5400" b="1">
+              <a:defRPr sz="5600" b="1">
                 <a:solidFill>
-                  <a:srgbClr val="162314"/>
+                  <a:srgbClr val="142012"/>
                 </a:solidFill>
               </a:defRPr>
             </a:pPr>
@@ -5167,18 +5279,18 @@
         </p:nvSpPr>
         <p:spPr>
           <a:xfrm>
-            <a:off x="8961120" y="777240"/>
-            <a:ext cx="594360" cy="594360"/>
+            <a:off x="8961120" y="868680"/>
+            <a:ext cx="621792" cy="621792"/>
           </a:xfrm>
           <a:prstGeom prst="roundRect">
             <a:avLst/>
           </a:prstGeom>
           <a:solidFill>
-            <a:srgbClr val="A52A26"/>
+            <a:srgbClr val="A82824"/>
           </a:solidFill>
           <a:ln w="12700">
             <a:solidFill>
-              <a:srgbClr val="DCB482"/>
+              <a:srgbClr val="DCB982"/>
             </a:solidFill>
           </a:ln>
         </p:spPr>
@@ -5221,7 +5333,7 @@
         </p:nvSpPr>
         <p:spPr>
           <a:xfrm>
-            <a:off x="2377440" y="1920240"/>
+            <a:off x="2926080" y="2011680"/>
             <a:ext cx="347472" cy="3291840"/>
           </a:xfrm>
           <a:prstGeom prst="rect">
@@ -5238,24 +5350,24 @@
             <a:pPr algn="ctr">
               <a:defRPr sz="1500">
                 <a:solidFill>
-                  <a:srgbClr val="3A5034"/>
+                  <a:srgbClr val="384E32"/>
                 </a:solidFill>
               </a:defRPr>
             </a:pPr>
             <a:r>
-              <a:t>昨</a:t>
+              <a:t>寒</a:t>
             </a:r>
             <a:br/>
             <a:r>
-              <a:t>夜</a:t>
+              <a:t>蝉</a:t>
             </a:r>
             <a:br/>
             <a:r>
-              <a:t>疏</a:t>
+              <a:t>凄</a:t>
             </a:r>
             <a:br/>
             <a:r>
-              <a:t>风</a:t>
+              <a:t>切</a:t>
             </a:r>
             <a:br/>
             <a:r>
@@ -5264,6 +5376,10 @@
             <a:br/>
             <a:r>
               <a:t>雨</a:t>
+            </a:r>
+            <a:br/>
+            <a:r>
+              <a:t>歇</a:t>
             </a:r>
           </a:p>
         </p:txBody>
@@ -5276,7 +5392,7 @@
         </p:nvSpPr>
         <p:spPr>
           <a:xfrm>
-            <a:off x="1920240" y="1920240"/>
+            <a:off x="2377440" y="2011680"/>
             <a:ext cx="347472" cy="3291840"/>
           </a:xfrm>
           <a:prstGeom prst="rect">
@@ -5293,32 +5409,36 @@
             <a:pPr algn="ctr">
               <a:defRPr sz="1500">
                 <a:solidFill>
-                  <a:srgbClr val="3A5034"/>
+                  <a:srgbClr val="384E32"/>
                 </a:solidFill>
               </a:defRPr>
             </a:pPr>
             <a:r>
-              <a:t>浓</a:t>
+              <a:t>多</a:t>
             </a:r>
             <a:br/>
             <a:r>
-              <a:t>睡</a:t>
+              <a:t>情</a:t>
             </a:r>
             <a:br/>
             <a:r>
-              <a:t>不</a:t>
+              <a:t>自</a:t>
             </a:r>
             <a:br/>
             <a:r>
-              <a:t>消</a:t>
+              <a:t>古</a:t>
             </a:r>
             <a:br/>
             <a:r>
-              <a:t>残</a:t>
+              <a:t>伤</a:t>
             </a:r>
             <a:br/>
             <a:r>
-              <a:t>酒</a:t>
+              <a:t>离</a:t>
+            </a:r>
+            <a:br/>
+            <a:r>
+              <a:t>别</a:t>
             </a:r>
           </a:p>
         </p:txBody>
@@ -5331,7 +5451,7 @@
         </p:nvSpPr>
         <p:spPr>
           <a:xfrm>
-            <a:off x="1463040" y="1920240"/>
+            <a:off x="1828800" y="2011680"/>
             <a:ext cx="347472" cy="3291840"/>
           </a:xfrm>
           <a:prstGeom prst="rect">
@@ -5348,32 +5468,36 @@
             <a:pPr algn="ctr">
               <a:defRPr sz="1500">
                 <a:solidFill>
-                  <a:srgbClr val="3A5034"/>
+                  <a:srgbClr val="384E32"/>
                 </a:solidFill>
               </a:defRPr>
             </a:pPr>
             <a:r>
-              <a:t>试</a:t>
+              <a:t>今</a:t>
             </a:r>
             <a:br/>
             <a:r>
-              <a:t>问</a:t>
+              <a:t>宵</a:t>
             </a:r>
             <a:br/>
             <a:r>
-              <a:t>卷</a:t>
+              <a:t>酒</a:t>
             </a:r>
             <a:br/>
             <a:r>
-              <a:t>帘</a:t>
+              <a:t>醒</a:t>
             </a:r>
             <a:br/>
             <a:r>
-              <a:t>之</a:t>
+              <a:t>杨</a:t>
             </a:r>
             <a:br/>
             <a:r>
-              <a:t>人</a:t>
+              <a:t>柳</a:t>
+            </a:r>
+            <a:br/>
+            <a:r>
+              <a:t>岸</a:t>
             </a:r>
           </a:p>
         </p:txBody>
@@ -5386,7 +5510,7 @@
         </p:nvSpPr>
         <p:spPr>
           <a:xfrm>
-            <a:off x="1005840" y="1920240"/>
+            <a:off x="1280160" y="2011680"/>
             <a:ext cx="347472" cy="3291840"/>
           </a:xfrm>
           <a:prstGeom prst="rect">
@@ -5403,32 +5527,36 @@
             <a:pPr algn="ctr">
               <a:defRPr sz="1500">
                 <a:solidFill>
-                  <a:srgbClr val="3A5034"/>
+                  <a:srgbClr val="384E32"/>
                 </a:solidFill>
               </a:defRPr>
             </a:pPr>
             <a:r>
-              <a:t>却</a:t>
+              <a:t>便</a:t>
             </a:r>
             <a:br/>
             <a:r>
-              <a:t>道</a:t>
+              <a:t>纵</a:t>
             </a:r>
             <a:br/>
             <a:r>
-              <a:t>海</a:t>
+              <a:t>风</a:t>
             </a:r>
             <a:br/>
             <a:r>
-              <a:t>棠</a:t>
+              <a:t>情</a:t>
             </a:r>
             <a:br/>
             <a:r>
-              <a:t>依</a:t>
+              <a:t>更</a:t>
             </a:r>
             <a:br/>
             <a:r>
-              <a:t>旧</a:t>
+              <a:t>与</a:t>
+            </a:r>
+            <a:br/>
+            <a:r>
+              <a:t>谁</a:t>
             </a:r>
           </a:p>
         </p:txBody>

--- a/knowledge/Productivity/Fan_Native_Master.pptx
+++ b/knowledge/Productivity/Fan_Native_Master.pptx
@@ -3165,15 +3165,18 @@
           <p:nvPr/>
         </p:nvSpPr>
         <p:spPr>
-          <a:xfrm rot="14265000">
-            <a:off x="8046720" y="5010912"/>
-            <a:ext cx="4937760" cy="36576"/>
-          </a:xfrm>
-          <a:prstGeom prst="rect">
-            <a:avLst/>
+          <a:xfrm rot="14241000">
+            <a:off x="3108960" y="91440"/>
+            <a:ext cx="9875520" cy="9875520"/>
+          </a:xfrm>
+          <a:prstGeom prst="pie">
+            <a:avLst>
+              <a:gd name="adj1" fmla="val 0"/>
+              <a:gd name="adj2" fmla="val 80000"/>
+            </a:avLst>
           </a:prstGeom>
           <a:solidFill>
-            <a:srgbClr val="A08255"/>
+            <a:srgbClr val="A07D4B"/>
           </a:solidFill>
           <a:ln>
             <a:noFill/>
@@ -3208,15 +3211,18 @@
           <p:nvPr/>
         </p:nvSpPr>
         <p:spPr>
-          <a:xfrm rot="14265000">
-            <a:off x="8046720" y="5010912"/>
-            <a:ext cx="4937760" cy="36576"/>
-          </a:xfrm>
-          <a:prstGeom prst="rect">
-            <a:avLst/>
+          <a:xfrm rot="14241000">
+            <a:off x="3108960" y="91440"/>
+            <a:ext cx="9875520" cy="9875520"/>
+          </a:xfrm>
+          <a:prstGeom prst="pie">
+            <a:avLst>
+              <a:gd name="adj1" fmla="val 0"/>
+              <a:gd name="adj2" fmla="val 80000"/>
+            </a:avLst>
           </a:prstGeom>
           <a:solidFill>
-            <a:srgbClr val="A08255"/>
+            <a:srgbClr val="A07D4B"/>
           </a:solidFill>
           <a:ln>
             <a:noFill/>
@@ -3251,15 +3257,18 @@
           <p:nvPr/>
         </p:nvSpPr>
         <p:spPr>
-          <a:xfrm rot="14265000">
-            <a:off x="8046720" y="5010912"/>
-            <a:ext cx="4937760" cy="36576"/>
-          </a:xfrm>
-          <a:prstGeom prst="rect">
-            <a:avLst/>
+          <a:xfrm rot="14241000">
+            <a:off x="3108960" y="91440"/>
+            <a:ext cx="9875520" cy="9875520"/>
+          </a:xfrm>
+          <a:prstGeom prst="pie">
+            <a:avLst>
+              <a:gd name="adj1" fmla="val 0"/>
+              <a:gd name="adj2" fmla="val 80000"/>
+            </a:avLst>
           </a:prstGeom>
           <a:solidFill>
-            <a:srgbClr val="A08255"/>
+            <a:srgbClr val="A07D4B"/>
           </a:solidFill>
           <a:ln>
             <a:noFill/>
@@ -3294,15 +3303,18 @@
           <p:nvPr/>
         </p:nvSpPr>
         <p:spPr>
-          <a:xfrm rot="14265000">
-            <a:off x="8046720" y="5010912"/>
-            <a:ext cx="4937760" cy="36576"/>
-          </a:xfrm>
-          <a:prstGeom prst="rect">
-            <a:avLst/>
+          <a:xfrm rot="14241000">
+            <a:off x="3108960" y="91440"/>
+            <a:ext cx="9875520" cy="9875520"/>
+          </a:xfrm>
+          <a:prstGeom prst="pie">
+            <a:avLst>
+              <a:gd name="adj1" fmla="val 0"/>
+              <a:gd name="adj2" fmla="val 80000"/>
+            </a:avLst>
           </a:prstGeom>
           <a:solidFill>
-            <a:srgbClr val="A08255"/>
+            <a:srgbClr val="A07D4B"/>
           </a:solidFill>
           <a:ln>
             <a:noFill/>
@@ -3337,15 +3349,18 @@
           <p:nvPr/>
         </p:nvSpPr>
         <p:spPr>
-          <a:xfrm rot="14265000">
-            <a:off x="8046720" y="5010912"/>
-            <a:ext cx="4937760" cy="36576"/>
-          </a:xfrm>
-          <a:prstGeom prst="rect">
-            <a:avLst/>
+          <a:xfrm rot="14241000">
+            <a:off x="3108960" y="91440"/>
+            <a:ext cx="9875520" cy="9875520"/>
+          </a:xfrm>
+          <a:prstGeom prst="pie">
+            <a:avLst>
+              <a:gd name="adj1" fmla="val 0"/>
+              <a:gd name="adj2" fmla="val 80000"/>
+            </a:avLst>
           </a:prstGeom>
           <a:solidFill>
-            <a:srgbClr val="A08255"/>
+            <a:srgbClr val="A07D4B"/>
           </a:solidFill>
           <a:ln>
             <a:noFill/>
@@ -3380,15 +3395,18 @@
           <p:nvPr/>
         </p:nvSpPr>
         <p:spPr>
-          <a:xfrm rot="14265000">
-            <a:off x="8046720" y="5010912"/>
-            <a:ext cx="4937760" cy="36576"/>
-          </a:xfrm>
-          <a:prstGeom prst="rect">
-            <a:avLst/>
+          <a:xfrm rot="14241000">
+            <a:off x="3108960" y="91440"/>
+            <a:ext cx="9875520" cy="9875520"/>
+          </a:xfrm>
+          <a:prstGeom prst="pie">
+            <a:avLst>
+              <a:gd name="adj1" fmla="val 0"/>
+              <a:gd name="adj2" fmla="val 80000"/>
+            </a:avLst>
           </a:prstGeom>
           <a:solidFill>
-            <a:srgbClr val="A08255"/>
+            <a:srgbClr val="A07D4B"/>
           </a:solidFill>
           <a:ln>
             <a:noFill/>
@@ -3418,7 +3436,99 @@
       </p:sp>
       <p:sp>
         <p:nvSpPr>
-          <p:cNvPr id="10" name="!!FanBlade1"/>
+          <p:cNvPr id="10" name="!!FanGuardLeft"/>
+          <p:cNvSpPr/>
+          <p:nvPr/>
+        </p:nvSpPr>
+        <p:spPr>
+          <a:xfrm rot="13464000">
+            <a:off x="3108960" y="91440"/>
+            <a:ext cx="9875520" cy="9875520"/>
+          </a:xfrm>
+          <a:prstGeom prst="pie">
+            <a:avLst>
+              <a:gd name="adj1" fmla="val 0"/>
+              <a:gd name="adj2" fmla="val 120000"/>
+            </a:avLst>
+          </a:prstGeom>
+          <a:solidFill>
+            <a:srgbClr val="785A37"/>
+          </a:solidFill>
+          <a:ln>
+            <a:noFill/>
+          </a:ln>
+        </p:spPr>
+        <p:style>
+          <a:lnRef idx="1">
+            <a:schemeClr val="accent1"/>
+          </a:lnRef>
+          <a:fillRef idx="3">
+            <a:schemeClr val="accent1"/>
+          </a:fillRef>
+          <a:effectRef idx="2">
+            <a:schemeClr val="accent1"/>
+          </a:effectRef>
+          <a:fontRef idx="minor">
+            <a:schemeClr val="lt1"/>
+          </a:fontRef>
+        </p:style>
+        <p:txBody>
+          <a:bodyPr rtlCol="0" anchor="ctr"/>
+          <a:lstStyle/>
+          <a:p>
+            <a:pPr algn="ctr"/>
+          </a:p>
+        </p:txBody>
+      </p:sp>
+      <p:sp>
+        <p:nvSpPr>
+          <p:cNvPr id="11" name="!!FanGuardRight"/>
+          <p:cNvSpPr/>
+          <p:nvPr/>
+        </p:nvSpPr>
+        <p:spPr>
+          <a:xfrm rot="14994000">
+            <a:off x="3108960" y="91440"/>
+            <a:ext cx="9875520" cy="9875520"/>
+          </a:xfrm>
+          <a:prstGeom prst="pie">
+            <a:avLst>
+              <a:gd name="adj1" fmla="val 0"/>
+              <a:gd name="adj2" fmla="val 120000"/>
+            </a:avLst>
+          </a:prstGeom>
+          <a:solidFill>
+            <a:srgbClr val="785A37"/>
+          </a:solidFill>
+          <a:ln>
+            <a:noFill/>
+          </a:ln>
+        </p:spPr>
+        <p:style>
+          <a:lnRef idx="1">
+            <a:schemeClr val="accent1"/>
+          </a:lnRef>
+          <a:fillRef idx="3">
+            <a:schemeClr val="accent1"/>
+          </a:fillRef>
+          <a:effectRef idx="2">
+            <a:schemeClr val="accent1"/>
+          </a:effectRef>
+          <a:fontRef idx="minor">
+            <a:schemeClr val="lt1"/>
+          </a:fontRef>
+        </p:style>
+        <p:txBody>
+          <a:bodyPr rtlCol="0" anchor="ctr"/>
+          <a:lstStyle/>
+          <a:p>
+            <a:pPr algn="ctr"/>
+          </a:p>
+        </p:txBody>
+      </p:sp>
+      <p:sp>
+        <p:nvSpPr>
+          <p:cNvPr id="12" name="!!FanBlade1"/>
           <p:cNvSpPr/>
           <p:nvPr/>
         </p:nvSpPr>
@@ -3492,7 +3602,7 @@
       </p:sp>
       <p:sp>
         <p:nvSpPr>
-          <p:cNvPr id="11" name="!!FanBlade2"/>
+          <p:cNvPr id="13" name="!!FanBlade2"/>
           <p:cNvSpPr/>
           <p:nvPr/>
         </p:nvSpPr>
@@ -3566,7 +3676,7 @@
       </p:sp>
       <p:sp>
         <p:nvSpPr>
-          <p:cNvPr id="12" name="!!FanBlade3"/>
+          <p:cNvPr id="14" name="!!FanBlade3"/>
           <p:cNvSpPr/>
           <p:nvPr/>
         </p:nvSpPr>
@@ -3640,7 +3750,7 @@
       </p:sp>
       <p:sp>
         <p:nvSpPr>
-          <p:cNvPr id="13" name="!!FanBlade4"/>
+          <p:cNvPr id="15" name="!!FanBlade4"/>
           <p:cNvSpPr/>
           <p:nvPr/>
         </p:nvSpPr>
@@ -3714,7 +3824,7 @@
       </p:sp>
       <p:sp>
         <p:nvSpPr>
-          <p:cNvPr id="14" name="!!FanBlade5"/>
+          <p:cNvPr id="16" name="!!FanBlade5"/>
           <p:cNvSpPr/>
           <p:nvPr/>
         </p:nvSpPr>
@@ -3788,7 +3898,7 @@
       </p:sp>
       <p:sp>
         <p:nvSpPr>
-          <p:cNvPr id="15" name="!!FanBlade6"/>
+          <p:cNvPr id="17" name="!!FanBlade6"/>
           <p:cNvSpPr/>
           <p:nvPr/>
         </p:nvSpPr>
@@ -3862,7 +3972,7 @@
       </p:sp>
       <p:sp>
         <p:nvSpPr>
-          <p:cNvPr id="16" name="!!JadeRing"/>
+          <p:cNvPr id="18" name="!!JadeRing"/>
           <p:cNvSpPr/>
           <p:nvPr/>
         </p:nvSpPr>
@@ -3907,7 +4017,7 @@
       </p:sp>
       <p:sp>
         <p:nvSpPr>
-          <p:cNvPr id="17" name="!!GoldRing"/>
+          <p:cNvPr id="19" name="!!GoldRing"/>
           <p:cNvSpPr/>
           <p:nvPr/>
         </p:nvSpPr>
@@ -3950,7 +4060,7 @@
       </p:sp>
       <p:sp>
         <p:nvSpPr>
-          <p:cNvPr id="18" name="!!CoreJade"/>
+          <p:cNvPr id="20" name="!!CoreJade"/>
           <p:cNvSpPr/>
           <p:nvPr/>
         </p:nvSpPr>
@@ -3993,7 +4103,7 @@
       </p:sp>
       <p:sp>
         <p:nvSpPr>
-          <p:cNvPr id="19" name="!!MainTitle"/>
+          <p:cNvPr id="21" name="!!MainTitle"/>
           <p:cNvSpPr txBox="1"/>
           <p:nvPr/>
         </p:nvSpPr>
@@ -4028,7 +4138,7 @@
       </p:sp>
       <p:sp>
         <p:nvSpPr>
-          <p:cNvPr id="20" name="!!Seal"/>
+          <p:cNvPr id="22" name="!!Seal"/>
           <p:cNvSpPr/>
           <p:nvPr/>
         </p:nvSpPr>
@@ -4082,7 +4192,7 @@
       </p:sp>
       <p:sp>
         <p:nvSpPr>
-          <p:cNvPr id="21" name="!!PoemCol0"/>
+          <p:cNvPr id="23" name="!!PoemCol0"/>
           <p:cNvSpPr txBox="1"/>
           <p:nvPr/>
         </p:nvSpPr>
@@ -4141,7 +4251,7 @@
       </p:sp>
       <p:sp>
         <p:nvSpPr>
-          <p:cNvPr id="22" name="!!PoemCol1"/>
+          <p:cNvPr id="24" name="!!PoemCol1"/>
           <p:cNvSpPr txBox="1"/>
           <p:nvPr/>
         </p:nvSpPr>
@@ -4200,7 +4310,7 @@
       </p:sp>
       <p:sp>
         <p:nvSpPr>
-          <p:cNvPr id="23" name="!!PoemCol2"/>
+          <p:cNvPr id="25" name="!!PoemCol2"/>
           <p:cNvSpPr txBox="1"/>
           <p:nvPr/>
         </p:nvSpPr>
@@ -4259,7 +4369,7 @@
       </p:sp>
       <p:sp>
         <p:nvSpPr>
-          <p:cNvPr id="24" name="!!PoemCol3"/>
+          <p:cNvPr id="26" name="!!PoemCol3"/>
           <p:cNvSpPr txBox="1"/>
           <p:nvPr/>
         </p:nvSpPr>
@@ -4410,15 +4520,18 @@
           <p:nvPr/>
         </p:nvSpPr>
         <p:spPr>
-          <a:xfrm rot="14265000">
-            <a:off x="8046720" y="5010912"/>
-            <a:ext cx="4937760" cy="36576"/>
-          </a:xfrm>
-          <a:prstGeom prst="rect">
-            <a:avLst/>
+          <a:xfrm rot="14241000">
+            <a:off x="3108960" y="91440"/>
+            <a:ext cx="9875520" cy="9875520"/>
+          </a:xfrm>
+          <a:prstGeom prst="pie">
+            <a:avLst>
+              <a:gd name="adj1" fmla="val 0"/>
+              <a:gd name="adj2" fmla="val 80000"/>
+            </a:avLst>
           </a:prstGeom>
           <a:solidFill>
-            <a:srgbClr val="A08255"/>
+            <a:srgbClr val="A07D4B"/>
           </a:solidFill>
           <a:ln>
             <a:noFill/>
@@ -4453,15 +4566,18 @@
           <p:nvPr/>
         </p:nvSpPr>
         <p:spPr>
-          <a:xfrm rot="15975000">
-            <a:off x="8046720" y="5010912"/>
-            <a:ext cx="4937760" cy="36576"/>
-          </a:xfrm>
-          <a:prstGeom prst="rect">
-            <a:avLst/>
+          <a:xfrm rot="15951000">
+            <a:off x="3108960" y="91440"/>
+            <a:ext cx="9875520" cy="9875520"/>
+          </a:xfrm>
+          <a:prstGeom prst="pie">
+            <a:avLst>
+              <a:gd name="adj1" fmla="val 0"/>
+              <a:gd name="adj2" fmla="val 80000"/>
+            </a:avLst>
           </a:prstGeom>
           <a:solidFill>
-            <a:srgbClr val="A08255"/>
+            <a:srgbClr val="A07D4B"/>
           </a:solidFill>
           <a:ln>
             <a:noFill/>
@@ -4496,15 +4612,18 @@
           <p:nvPr/>
         </p:nvSpPr>
         <p:spPr>
-          <a:xfrm rot="17685000">
-            <a:off x="8046720" y="5010912"/>
-            <a:ext cx="4937760" cy="36576"/>
-          </a:xfrm>
-          <a:prstGeom prst="rect">
-            <a:avLst/>
+          <a:xfrm rot="17661000">
+            <a:off x="3108960" y="91440"/>
+            <a:ext cx="9875520" cy="9875520"/>
+          </a:xfrm>
+          <a:prstGeom prst="pie">
+            <a:avLst>
+              <a:gd name="adj1" fmla="val 0"/>
+              <a:gd name="adj2" fmla="val 80000"/>
+            </a:avLst>
           </a:prstGeom>
           <a:solidFill>
-            <a:srgbClr val="A08255"/>
+            <a:srgbClr val="A07D4B"/>
           </a:solidFill>
           <a:ln>
             <a:noFill/>
@@ -4539,15 +4658,18 @@
           <p:nvPr/>
         </p:nvSpPr>
         <p:spPr>
-          <a:xfrm rot="19395000">
-            <a:off x="8046720" y="5010912"/>
-            <a:ext cx="4937760" cy="36576"/>
-          </a:xfrm>
-          <a:prstGeom prst="rect">
-            <a:avLst/>
+          <a:xfrm rot="19371000">
+            <a:off x="3108960" y="91440"/>
+            <a:ext cx="9875520" cy="9875520"/>
+          </a:xfrm>
+          <a:prstGeom prst="pie">
+            <a:avLst>
+              <a:gd name="adj1" fmla="val 0"/>
+              <a:gd name="adj2" fmla="val 80000"/>
+            </a:avLst>
           </a:prstGeom>
           <a:solidFill>
-            <a:srgbClr val="A08255"/>
+            <a:srgbClr val="A07D4B"/>
           </a:solidFill>
           <a:ln>
             <a:noFill/>
@@ -4582,15 +4704,18 @@
           <p:nvPr/>
         </p:nvSpPr>
         <p:spPr>
-          <a:xfrm rot="21105000">
-            <a:off x="8046720" y="5010912"/>
-            <a:ext cx="4937760" cy="36576"/>
-          </a:xfrm>
-          <a:prstGeom prst="rect">
-            <a:avLst/>
+          <a:xfrm rot="21081000">
+            <a:off x="3108960" y="91440"/>
+            <a:ext cx="9875520" cy="9875520"/>
+          </a:xfrm>
+          <a:prstGeom prst="pie">
+            <a:avLst>
+              <a:gd name="adj1" fmla="val 0"/>
+              <a:gd name="adj2" fmla="val 80000"/>
+            </a:avLst>
           </a:prstGeom>
           <a:solidFill>
-            <a:srgbClr val="A08255"/>
+            <a:srgbClr val="A07D4B"/>
           </a:solidFill>
           <a:ln>
             <a:noFill/>
@@ -4625,15 +4750,18 @@
           <p:nvPr/>
         </p:nvSpPr>
         <p:spPr>
-          <a:xfrm rot="1215000">
-            <a:off x="8046720" y="5010912"/>
-            <a:ext cx="4937760" cy="36576"/>
-          </a:xfrm>
-          <a:prstGeom prst="rect">
-            <a:avLst/>
+          <a:xfrm rot="1191000">
+            <a:off x="3108960" y="91440"/>
+            <a:ext cx="9875520" cy="9875520"/>
+          </a:xfrm>
+          <a:prstGeom prst="pie">
+            <a:avLst>
+              <a:gd name="adj1" fmla="val 0"/>
+              <a:gd name="adj2" fmla="val 80000"/>
+            </a:avLst>
           </a:prstGeom>
           <a:solidFill>
-            <a:srgbClr val="A08255"/>
+            <a:srgbClr val="A07D4B"/>
           </a:solidFill>
           <a:ln>
             <a:noFill/>
@@ -4663,7 +4791,99 @@
       </p:sp>
       <p:sp>
         <p:nvSpPr>
-          <p:cNvPr id="10" name="!!FanBlade1"/>
+          <p:cNvPr id="10" name="!!FanGuardLeft"/>
+          <p:cNvSpPr/>
+          <p:nvPr/>
+        </p:nvSpPr>
+        <p:spPr>
+          <a:xfrm rot="13464000">
+            <a:off x="3108960" y="91440"/>
+            <a:ext cx="9875520" cy="9875520"/>
+          </a:xfrm>
+          <a:prstGeom prst="pie">
+            <a:avLst>
+              <a:gd name="adj1" fmla="val 0"/>
+              <a:gd name="adj2" fmla="val 120000"/>
+            </a:avLst>
+          </a:prstGeom>
+          <a:solidFill>
+            <a:srgbClr val="785A37"/>
+          </a:solidFill>
+          <a:ln>
+            <a:noFill/>
+          </a:ln>
+        </p:spPr>
+        <p:style>
+          <a:lnRef idx="1">
+            <a:schemeClr val="accent1"/>
+          </a:lnRef>
+          <a:fillRef idx="3">
+            <a:schemeClr val="accent1"/>
+          </a:fillRef>
+          <a:effectRef idx="2">
+            <a:schemeClr val="accent1"/>
+          </a:effectRef>
+          <a:fontRef idx="minor">
+            <a:schemeClr val="lt1"/>
+          </a:fontRef>
+        </p:style>
+        <p:txBody>
+          <a:bodyPr rtlCol="0" anchor="ctr"/>
+          <a:lstStyle/>
+          <a:p>
+            <a:pPr algn="ctr"/>
+          </a:p>
+        </p:txBody>
+      </p:sp>
+      <p:sp>
+        <p:nvSpPr>
+          <p:cNvPr id="11" name="!!FanGuardRight"/>
+          <p:cNvSpPr/>
+          <p:nvPr/>
+        </p:nvSpPr>
+        <p:spPr>
+          <a:xfrm rot="1944000">
+            <a:off x="3108960" y="91440"/>
+            <a:ext cx="9875520" cy="9875520"/>
+          </a:xfrm>
+          <a:prstGeom prst="pie">
+            <a:avLst>
+              <a:gd name="adj1" fmla="val 0"/>
+              <a:gd name="adj2" fmla="val 120000"/>
+            </a:avLst>
+          </a:prstGeom>
+          <a:solidFill>
+            <a:srgbClr val="785A37"/>
+          </a:solidFill>
+          <a:ln>
+            <a:noFill/>
+          </a:ln>
+        </p:spPr>
+        <p:style>
+          <a:lnRef idx="1">
+            <a:schemeClr val="accent1"/>
+          </a:lnRef>
+          <a:fillRef idx="3">
+            <a:schemeClr val="accent1"/>
+          </a:fillRef>
+          <a:effectRef idx="2">
+            <a:schemeClr val="accent1"/>
+          </a:effectRef>
+          <a:fontRef idx="minor">
+            <a:schemeClr val="lt1"/>
+          </a:fontRef>
+        </p:style>
+        <p:txBody>
+          <a:bodyPr rtlCol="0" anchor="ctr"/>
+          <a:lstStyle/>
+          <a:p>
+            <a:pPr algn="ctr"/>
+          </a:p>
+        </p:txBody>
+      </p:sp>
+      <p:sp>
+        <p:nvSpPr>
+          <p:cNvPr id="12" name="!!FanBlade1"/>
           <p:cNvSpPr/>
           <p:nvPr/>
         </p:nvSpPr>
@@ -4737,7 +4957,7 @@
       </p:sp>
       <p:sp>
         <p:nvSpPr>
-          <p:cNvPr id="11" name="!!FanBlade2"/>
+          <p:cNvPr id="13" name="!!FanBlade2"/>
           <p:cNvSpPr/>
           <p:nvPr/>
         </p:nvSpPr>
@@ -4811,7 +5031,7 @@
       </p:sp>
       <p:sp>
         <p:nvSpPr>
-          <p:cNvPr id="12" name="!!FanBlade3"/>
+          <p:cNvPr id="14" name="!!FanBlade3"/>
           <p:cNvSpPr/>
           <p:nvPr/>
         </p:nvSpPr>
@@ -4885,7 +5105,7 @@
       </p:sp>
       <p:sp>
         <p:nvSpPr>
-          <p:cNvPr id="13" name="!!FanBlade4"/>
+          <p:cNvPr id="15" name="!!FanBlade4"/>
           <p:cNvSpPr/>
           <p:nvPr/>
         </p:nvSpPr>
@@ -4959,7 +5179,7 @@
       </p:sp>
       <p:sp>
         <p:nvSpPr>
-          <p:cNvPr id="14" name="!!FanBlade5"/>
+          <p:cNvPr id="16" name="!!FanBlade5"/>
           <p:cNvSpPr/>
           <p:nvPr/>
         </p:nvSpPr>
@@ -5033,7 +5253,7 @@
       </p:sp>
       <p:sp>
         <p:nvSpPr>
-          <p:cNvPr id="15" name="!!FanBlade6"/>
+          <p:cNvPr id="17" name="!!FanBlade6"/>
           <p:cNvSpPr/>
           <p:nvPr/>
         </p:nvSpPr>
@@ -5107,7 +5327,7 @@
       </p:sp>
       <p:sp>
         <p:nvSpPr>
-          <p:cNvPr id="16" name="!!JadeRing"/>
+          <p:cNvPr id="18" name="!!JadeRing"/>
           <p:cNvSpPr/>
           <p:nvPr/>
         </p:nvSpPr>
@@ -5152,7 +5372,7 @@
       </p:sp>
       <p:sp>
         <p:nvSpPr>
-          <p:cNvPr id="17" name="!!GoldRing"/>
+          <p:cNvPr id="19" name="!!GoldRing"/>
           <p:cNvSpPr/>
           <p:nvPr/>
         </p:nvSpPr>
@@ -5195,7 +5415,7 @@
       </p:sp>
       <p:sp>
         <p:nvSpPr>
-          <p:cNvPr id="18" name="!!CoreJade"/>
+          <p:cNvPr id="20" name="!!CoreJade"/>
           <p:cNvSpPr/>
           <p:nvPr/>
         </p:nvSpPr>
@@ -5238,7 +5458,7 @@
       </p:sp>
       <p:sp>
         <p:nvSpPr>
-          <p:cNvPr id="19" name="!!MainTitle"/>
+          <p:cNvPr id="21" name="!!MainTitle"/>
           <p:cNvSpPr txBox="1"/>
           <p:nvPr/>
         </p:nvSpPr>
@@ -5273,7 +5493,7 @@
       </p:sp>
       <p:sp>
         <p:nvSpPr>
-          <p:cNvPr id="20" name="!!Seal"/>
+          <p:cNvPr id="22" name="!!Seal"/>
           <p:cNvSpPr/>
           <p:nvPr/>
         </p:nvSpPr>
@@ -5327,7 +5547,7 @@
       </p:sp>
       <p:sp>
         <p:nvSpPr>
-          <p:cNvPr id="21" name="!!PoemCol0"/>
+          <p:cNvPr id="23" name="!!PoemCol0"/>
           <p:cNvSpPr txBox="1"/>
           <p:nvPr/>
         </p:nvSpPr>
@@ -5386,7 +5606,7 @@
       </p:sp>
       <p:sp>
         <p:nvSpPr>
-          <p:cNvPr id="22" name="!!PoemCol1"/>
+          <p:cNvPr id="24" name="!!PoemCol1"/>
           <p:cNvSpPr txBox="1"/>
           <p:nvPr/>
         </p:nvSpPr>
@@ -5445,7 +5665,7 @@
       </p:sp>
       <p:sp>
         <p:nvSpPr>
-          <p:cNvPr id="23" name="!!PoemCol2"/>
+          <p:cNvPr id="25" name="!!PoemCol2"/>
           <p:cNvSpPr txBox="1"/>
           <p:nvPr/>
         </p:nvSpPr>
@@ -5504,7 +5724,7 @@
       </p:sp>
       <p:sp>
         <p:nvSpPr>
-          <p:cNvPr id="24" name="!!PoemCol3"/>
+          <p:cNvPr id="26" name="!!PoemCol3"/>
           <p:cNvSpPr txBox="1"/>
           <p:nvPr/>
         </p:nvSpPr>

--- a/knowledge/Productivity/Fan_Native_Master.pptx
+++ b/knowledge/Productivity/Fan_Native_Master.pptx
@@ -3091,7 +3091,7 @@
       <p:grpSpPr/>
       <p:pic>
         <p:nvPicPr>
-          <p:cNvPr id="2" name="Picture 1" descr="courtyard_master_bg.jpg"/>
+          <p:cNvPr id="2" name="Picture 1" descr="authentic_fan_bg_hd.jpg"/>
           <p:cNvPicPr>
             <a:picLocks noChangeAspect="1"/>
           </p:cNvPicPr>
@@ -3132,7 +3132,7 @@
           </a:ln>
           <a:solidFill>
             <a:srgbClr val="FFFFFF">
-              <a:alpha val="28000"/>
+              <a:alpha val="26000"/>
             </a:srgbClr>
           </a:solidFill>
         </p:spPr>
@@ -3166,8 +3166,8 @@
         </p:nvSpPr>
         <p:spPr>
           <a:xfrm rot="14241000">
-            <a:off x="3108960" y="91440"/>
-            <a:ext cx="9875520" cy="9875520"/>
+            <a:off x="3291840" y="182880"/>
+            <a:ext cx="10241280" cy="10241280"/>
           </a:xfrm>
           <a:prstGeom prst="pie">
             <a:avLst>
@@ -3212,8 +3212,8 @@
         </p:nvSpPr>
         <p:spPr>
           <a:xfrm rot="14241000">
-            <a:off x="3108960" y="91440"/>
-            <a:ext cx="9875520" cy="9875520"/>
+            <a:off x="3291840" y="182880"/>
+            <a:ext cx="10241280" cy="10241280"/>
           </a:xfrm>
           <a:prstGeom prst="pie">
             <a:avLst>
@@ -3258,8 +3258,8 @@
         </p:nvSpPr>
         <p:spPr>
           <a:xfrm rot="14241000">
-            <a:off x="3108960" y="91440"/>
-            <a:ext cx="9875520" cy="9875520"/>
+            <a:off x="3291840" y="182880"/>
+            <a:ext cx="10241280" cy="10241280"/>
           </a:xfrm>
           <a:prstGeom prst="pie">
             <a:avLst>
@@ -3304,8 +3304,8 @@
         </p:nvSpPr>
         <p:spPr>
           <a:xfrm rot="14241000">
-            <a:off x="3108960" y="91440"/>
-            <a:ext cx="9875520" cy="9875520"/>
+            <a:off x="3291840" y="182880"/>
+            <a:ext cx="10241280" cy="10241280"/>
           </a:xfrm>
           <a:prstGeom prst="pie">
             <a:avLst>
@@ -3350,8 +3350,8 @@
         </p:nvSpPr>
         <p:spPr>
           <a:xfrm rot="14241000">
-            <a:off x="3108960" y="91440"/>
-            <a:ext cx="9875520" cy="9875520"/>
+            <a:off x="3291840" y="182880"/>
+            <a:ext cx="10241280" cy="10241280"/>
           </a:xfrm>
           <a:prstGeom prst="pie">
             <a:avLst>
@@ -3396,8 +3396,8 @@
         </p:nvSpPr>
         <p:spPr>
           <a:xfrm rot="14241000">
-            <a:off x="3108960" y="91440"/>
-            <a:ext cx="9875520" cy="9875520"/>
+            <a:off x="3291840" y="182880"/>
+            <a:ext cx="10241280" cy="10241280"/>
           </a:xfrm>
           <a:prstGeom prst="pie">
             <a:avLst>
@@ -3442,8 +3442,8 @@
         </p:nvSpPr>
         <p:spPr>
           <a:xfrm rot="13464000">
-            <a:off x="3108960" y="91440"/>
-            <a:ext cx="9875520" cy="9875520"/>
+            <a:off x="3291840" y="182880"/>
+            <a:ext cx="10241280" cy="10241280"/>
           </a:xfrm>
           <a:prstGeom prst="pie">
             <a:avLst>
@@ -3488,8 +3488,8 @@
         </p:nvSpPr>
         <p:spPr>
           <a:xfrm rot="14994000">
-            <a:off x="3108960" y="91440"/>
-            <a:ext cx="9875520" cy="9875520"/>
+            <a:off x="3291840" y="182880"/>
+            <a:ext cx="10241280" cy="10241280"/>
           </a:xfrm>
           <a:prstGeom prst="pie">
             <a:avLst>
@@ -3534,8 +3534,8 @@
         </p:nvSpPr>
         <p:spPr>
           <a:xfrm rot="13500000">
-            <a:off x="3108960" y="91440"/>
-            <a:ext cx="9875520" cy="9875520"/>
+            <a:off x="3291840" y="182880"/>
+            <a:ext cx="10241280" cy="10241280"/>
           </a:xfrm>
           <a:prstGeom prst="blockArc">
             <a:avLst>
@@ -3608,8 +3608,8 @@
         </p:nvSpPr>
         <p:spPr>
           <a:xfrm rot="13500000">
-            <a:off x="3108960" y="91440"/>
-            <a:ext cx="9875520" cy="9875520"/>
+            <a:off x="3291840" y="182880"/>
+            <a:ext cx="10241280" cy="10241280"/>
           </a:xfrm>
           <a:prstGeom prst="blockArc">
             <a:avLst>
@@ -3682,8 +3682,8 @@
         </p:nvSpPr>
         <p:spPr>
           <a:xfrm rot="13500000">
-            <a:off x="3108960" y="91440"/>
-            <a:ext cx="9875520" cy="9875520"/>
+            <a:off x="3291840" y="182880"/>
+            <a:ext cx="10241280" cy="10241280"/>
           </a:xfrm>
           <a:prstGeom prst="blockArc">
             <a:avLst>
@@ -3756,8 +3756,8 @@
         </p:nvSpPr>
         <p:spPr>
           <a:xfrm rot="13500000">
-            <a:off x="3108960" y="91440"/>
-            <a:ext cx="9875520" cy="9875520"/>
+            <a:off x="3291840" y="182880"/>
+            <a:ext cx="10241280" cy="10241280"/>
           </a:xfrm>
           <a:prstGeom prst="blockArc">
             <a:avLst>
@@ -3830,8 +3830,8 @@
         </p:nvSpPr>
         <p:spPr>
           <a:xfrm rot="13500000">
-            <a:off x="3108960" y="91440"/>
-            <a:ext cx="9875520" cy="9875520"/>
+            <a:off x="3291840" y="182880"/>
+            <a:ext cx="10241280" cy="10241280"/>
           </a:xfrm>
           <a:prstGeom prst="blockArc">
             <a:avLst>
@@ -3904,8 +3904,8 @@
         </p:nvSpPr>
         <p:spPr>
           <a:xfrm rot="13500000">
-            <a:off x="3108960" y="91440"/>
-            <a:ext cx="9875520" cy="9875520"/>
+            <a:off x="3291840" y="182880"/>
+            <a:ext cx="10241280" cy="10241280"/>
           </a:xfrm>
           <a:prstGeom prst="blockArc">
             <a:avLst>
@@ -3978,7 +3978,7 @@
         </p:nvSpPr>
         <p:spPr>
           <a:xfrm>
-            <a:off x="7662672" y="4645152"/>
+            <a:off x="8028432" y="4919472"/>
             <a:ext cx="768096" cy="768096"/>
           </a:xfrm>
           <a:prstGeom prst="ellipse">
@@ -4023,7 +4023,7 @@
         </p:nvSpPr>
         <p:spPr>
           <a:xfrm>
-            <a:off x="7827264" y="4809744"/>
+            <a:off x="8193024" y="5084064"/>
             <a:ext cx="438912" cy="438912"/>
           </a:xfrm>
           <a:prstGeom prst="ellipse">
@@ -4066,7 +4066,7 @@
         </p:nvSpPr>
         <p:spPr>
           <a:xfrm>
-            <a:off x="7927848" y="4910328"/>
+            <a:off x="8293608" y="5184648"/>
             <a:ext cx="237744" cy="237744"/>
           </a:xfrm>
           <a:prstGeom prst="ellipse">
@@ -4109,8 +4109,8 @@
         </p:nvSpPr>
         <p:spPr>
           <a:xfrm>
-            <a:off x="3474720" y="-2377440"/>
-            <a:ext cx="5303520" cy="1371600"/>
+            <a:off x="1097280" y="-2377440"/>
+            <a:ext cx="4572000" cy="1371600"/>
           </a:xfrm>
           <a:prstGeom prst="rect">
             <a:avLst/>
@@ -4124,7 +4124,7 @@
           <a:lstStyle/>
           <a:p>
             <a:pPr>
-              <a:defRPr sz="5600" b="1">
+              <a:defRPr sz="5400" b="1">
                 <a:solidFill>
                   <a:srgbClr val="142012"/>
                 </a:solidFill>
@@ -4144,7 +4144,7 @@
         </p:nvSpPr>
         <p:spPr>
           <a:xfrm>
-            <a:off x="8961120" y="-2103120"/>
+            <a:off x="5029200" y="-2194560"/>
             <a:ext cx="621792" cy="621792"/>
           </a:xfrm>
           <a:prstGeom prst="roundRect">
@@ -4192,14 +4192,14 @@
       </p:sp>
       <p:sp>
         <p:nvSpPr>
-          <p:cNvPr id="23" name="!!PoemCol0"/>
+          <p:cNvPr id="23" name="!!SubTitle"/>
           <p:cNvSpPr txBox="1"/>
           <p:nvPr/>
         </p:nvSpPr>
         <p:spPr>
           <a:xfrm>
-            <a:off x="12801600" y="2011680"/>
-            <a:ext cx="347472" cy="3291840"/>
+            <a:off x="1097280" y="-1371600"/>
+            <a:ext cx="5029200" cy="731520"/>
           </a:xfrm>
           <a:prstGeom prst="rect">
             <a:avLst/>
@@ -4207,57 +4207,33 @@
           <a:noFill/>
         </p:spPr>
         <p:txBody>
-          <a:bodyPr wrap="square">
+          <a:bodyPr wrap="none">
             <a:spAutoFit/>
           </a:bodyPr>
           <a:lstStyle/>
           <a:p>
-            <a:pPr algn="ctr">
-              <a:defRPr sz="1500">
+            <a:pPr>
+              <a:defRPr sz="1400">
                 <a:solidFill>
-                  <a:srgbClr val="384E32"/>
+                  <a:srgbClr val="465F41"/>
                 </a:solidFill>
               </a:defRPr>
             </a:pPr>
             <a:r>
-              <a:t>寒</a:t>
-            </a:r>
-            <a:br/>
-            <a:r>
-              <a:t>蝉</a:t>
-            </a:r>
-            <a:br/>
-            <a:r>
-              <a:t>凄</a:t>
-            </a:r>
-            <a:br/>
-            <a:r>
-              <a:t>切</a:t>
-            </a:r>
-            <a:br/>
-            <a:r>
-              <a:t>骤</a:t>
-            </a:r>
-            <a:br/>
-            <a:r>
-              <a:t>雨</a:t>
-            </a:r>
-            <a:br/>
-            <a:r>
-              <a:t>歇</a:t>
-            </a:r>
-          </a:p>
-        </p:txBody>
-      </p:sp>
-      <p:sp>
-        <p:nvSpPr>
-          <p:cNvPr id="24" name="!!PoemCol1"/>
+              <a:t>北宋 · 柳永  ｜  秋蝉凄清 · 骤雨初歇 · 晓风残月</a:t>
+            </a:r>
+          </a:p>
+        </p:txBody>
+      </p:sp>
+      <p:sp>
+        <p:nvSpPr>
+          <p:cNvPr id="24" name="!!PoemCol0"/>
           <p:cNvSpPr txBox="1"/>
           <p:nvPr/>
         </p:nvSpPr>
         <p:spPr>
           <a:xfrm>
-            <a:off x="13258800" y="2011680"/>
+            <a:off x="12801600" y="2743200"/>
             <a:ext cx="347472" cy="3291840"/>
           </a:xfrm>
           <a:prstGeom prst="rect">
@@ -4274,49 +4250,49 @@
             <a:pPr algn="ctr">
               <a:defRPr sz="1500">
                 <a:solidFill>
-                  <a:srgbClr val="384E32"/>
+                  <a:srgbClr val="30442C"/>
                 </a:solidFill>
               </a:defRPr>
             </a:pPr>
             <a:r>
-              <a:t>多</a:t>
+              <a:t>寒</a:t>
             </a:r>
             <a:br/>
             <a:r>
-              <a:t>情</a:t>
+              <a:t>蝉</a:t>
             </a:r>
             <a:br/>
             <a:r>
-              <a:t>自</a:t>
+              <a:t>凄</a:t>
             </a:r>
             <a:br/>
             <a:r>
-              <a:t>古</a:t>
+              <a:t>切</a:t>
             </a:r>
             <a:br/>
             <a:r>
-              <a:t>伤</a:t>
+              <a:t>骤</a:t>
             </a:r>
             <a:br/>
             <a:r>
-              <a:t>离</a:t>
+              <a:t>雨</a:t>
             </a:r>
             <a:br/>
             <a:r>
-              <a:t>别</a:t>
-            </a:r>
-          </a:p>
-        </p:txBody>
-      </p:sp>
-      <p:sp>
-        <p:nvSpPr>
-          <p:cNvPr id="25" name="!!PoemCol2"/>
+              <a:t>歇</a:t>
+            </a:r>
+          </a:p>
+        </p:txBody>
+      </p:sp>
+      <p:sp>
+        <p:nvSpPr>
+          <p:cNvPr id="25" name="!!PoemCol1"/>
           <p:cNvSpPr txBox="1"/>
           <p:nvPr/>
         </p:nvSpPr>
         <p:spPr>
           <a:xfrm>
-            <a:off x="13716000" y="2011680"/>
+            <a:off x="13258800" y="2743200"/>
             <a:ext cx="347472" cy="3291840"/>
           </a:xfrm>
           <a:prstGeom prst="rect">
@@ -4333,49 +4309,49 @@
             <a:pPr algn="ctr">
               <a:defRPr sz="1500">
                 <a:solidFill>
-                  <a:srgbClr val="384E32"/>
+                  <a:srgbClr val="30442C"/>
                 </a:solidFill>
               </a:defRPr>
             </a:pPr>
             <a:r>
-              <a:t>今</a:t>
+              <a:t>多</a:t>
             </a:r>
             <a:br/>
             <a:r>
-              <a:t>宵</a:t>
+              <a:t>情</a:t>
             </a:r>
             <a:br/>
             <a:r>
-              <a:t>酒</a:t>
+              <a:t>自</a:t>
             </a:r>
             <a:br/>
             <a:r>
-              <a:t>醒</a:t>
+              <a:t>古</a:t>
             </a:r>
             <a:br/>
             <a:r>
-              <a:t>杨</a:t>
+              <a:t>伤</a:t>
             </a:r>
             <a:br/>
             <a:r>
-              <a:t>柳</a:t>
+              <a:t>离</a:t>
             </a:r>
             <a:br/>
             <a:r>
-              <a:t>岸</a:t>
-            </a:r>
-          </a:p>
-        </p:txBody>
-      </p:sp>
-      <p:sp>
-        <p:nvSpPr>
-          <p:cNvPr id="26" name="!!PoemCol3"/>
+              <a:t>别</a:t>
+            </a:r>
+          </a:p>
+        </p:txBody>
+      </p:sp>
+      <p:sp>
+        <p:nvSpPr>
+          <p:cNvPr id="26" name="!!PoemCol2"/>
           <p:cNvSpPr txBox="1"/>
           <p:nvPr/>
         </p:nvSpPr>
         <p:spPr>
           <a:xfrm>
-            <a:off x="14173200" y="2011680"/>
+            <a:off x="13716000" y="2743200"/>
             <a:ext cx="347472" cy="3291840"/>
           </a:xfrm>
           <a:prstGeom prst="rect">
@@ -4392,7 +4368,66 @@
             <a:pPr algn="ctr">
               <a:defRPr sz="1500">
                 <a:solidFill>
-                  <a:srgbClr val="384E32"/>
+                  <a:srgbClr val="30442C"/>
+                </a:solidFill>
+              </a:defRPr>
+            </a:pPr>
+            <a:r>
+              <a:t>今</a:t>
+            </a:r>
+            <a:br/>
+            <a:r>
+              <a:t>宵</a:t>
+            </a:r>
+            <a:br/>
+            <a:r>
+              <a:t>酒</a:t>
+            </a:r>
+            <a:br/>
+            <a:r>
+              <a:t>醒</a:t>
+            </a:r>
+            <a:br/>
+            <a:r>
+              <a:t>杨</a:t>
+            </a:r>
+            <a:br/>
+            <a:r>
+              <a:t>柳</a:t>
+            </a:r>
+            <a:br/>
+            <a:r>
+              <a:t>岸</a:t>
+            </a:r>
+          </a:p>
+        </p:txBody>
+      </p:sp>
+      <p:sp>
+        <p:nvSpPr>
+          <p:cNvPr id="27" name="!!PoemCol3"/>
+          <p:cNvSpPr txBox="1"/>
+          <p:nvPr/>
+        </p:nvSpPr>
+        <p:spPr>
+          <a:xfrm>
+            <a:off x="14173200" y="2743200"/>
+            <a:ext cx="347472" cy="3291840"/>
+          </a:xfrm>
+          <a:prstGeom prst="rect">
+            <a:avLst/>
+          </a:prstGeom>
+          <a:noFill/>
+        </p:spPr>
+        <p:txBody>
+          <a:bodyPr wrap="square">
+            <a:spAutoFit/>
+          </a:bodyPr>
+          <a:lstStyle/>
+          <a:p>
+            <a:pPr algn="ctr">
+              <a:defRPr sz="1500">
+                <a:solidFill>
+                  <a:srgbClr val="30442C"/>
                 </a:solidFill>
               </a:defRPr>
             </a:pPr>
@@ -4446,7 +4481,7 @@
       <p:grpSpPr/>
       <p:pic>
         <p:nvPicPr>
-          <p:cNvPr id="2" name="Picture 1" descr="courtyard_master_bg.jpg"/>
+          <p:cNvPr id="2" name="Picture 1" descr="authentic_fan_bg_hd.jpg"/>
           <p:cNvPicPr>
             <a:picLocks noChangeAspect="1"/>
           </p:cNvPicPr>
@@ -4487,7 +4522,7 @@
           </a:ln>
           <a:solidFill>
             <a:srgbClr val="FFFFFF">
-              <a:alpha val="28000"/>
+              <a:alpha val="26000"/>
             </a:srgbClr>
           </a:solidFill>
         </p:spPr>
@@ -4521,8 +4556,8 @@
         </p:nvSpPr>
         <p:spPr>
           <a:xfrm rot="14241000">
-            <a:off x="3108960" y="91440"/>
-            <a:ext cx="9875520" cy="9875520"/>
+            <a:off x="3291840" y="182880"/>
+            <a:ext cx="10241280" cy="10241280"/>
           </a:xfrm>
           <a:prstGeom prst="pie">
             <a:avLst>
@@ -4567,8 +4602,8 @@
         </p:nvSpPr>
         <p:spPr>
           <a:xfrm rot="15951000">
-            <a:off x="3108960" y="91440"/>
-            <a:ext cx="9875520" cy="9875520"/>
+            <a:off x="3291840" y="182880"/>
+            <a:ext cx="10241280" cy="10241280"/>
           </a:xfrm>
           <a:prstGeom prst="pie">
             <a:avLst>
@@ -4613,8 +4648,8 @@
         </p:nvSpPr>
         <p:spPr>
           <a:xfrm rot="17661000">
-            <a:off x="3108960" y="91440"/>
-            <a:ext cx="9875520" cy="9875520"/>
+            <a:off x="3291840" y="182880"/>
+            <a:ext cx="10241280" cy="10241280"/>
           </a:xfrm>
           <a:prstGeom prst="pie">
             <a:avLst>
@@ -4659,8 +4694,8 @@
         </p:nvSpPr>
         <p:spPr>
           <a:xfrm rot="19371000">
-            <a:off x="3108960" y="91440"/>
-            <a:ext cx="9875520" cy="9875520"/>
+            <a:off x="3291840" y="182880"/>
+            <a:ext cx="10241280" cy="10241280"/>
           </a:xfrm>
           <a:prstGeom prst="pie">
             <a:avLst>
@@ -4705,8 +4740,8 @@
         </p:nvSpPr>
         <p:spPr>
           <a:xfrm rot="21081000">
-            <a:off x="3108960" y="91440"/>
-            <a:ext cx="9875520" cy="9875520"/>
+            <a:off x="3291840" y="182880"/>
+            <a:ext cx="10241280" cy="10241280"/>
           </a:xfrm>
           <a:prstGeom prst="pie">
             <a:avLst>
@@ -4751,8 +4786,8 @@
         </p:nvSpPr>
         <p:spPr>
           <a:xfrm rot="1191000">
-            <a:off x="3108960" y="91440"/>
-            <a:ext cx="9875520" cy="9875520"/>
+            <a:off x="3291840" y="182880"/>
+            <a:ext cx="10241280" cy="10241280"/>
           </a:xfrm>
           <a:prstGeom prst="pie">
             <a:avLst>
@@ -4797,8 +4832,8 @@
         </p:nvSpPr>
         <p:spPr>
           <a:xfrm rot="13464000">
-            <a:off x="3108960" y="91440"/>
-            <a:ext cx="9875520" cy="9875520"/>
+            <a:off x="3291840" y="182880"/>
+            <a:ext cx="10241280" cy="10241280"/>
           </a:xfrm>
           <a:prstGeom prst="pie">
             <a:avLst>
@@ -4843,8 +4878,8 @@
         </p:nvSpPr>
         <p:spPr>
           <a:xfrm rot="1944000">
-            <a:off x="3108960" y="91440"/>
-            <a:ext cx="9875520" cy="9875520"/>
+            <a:off x="3291840" y="182880"/>
+            <a:ext cx="10241280" cy="10241280"/>
           </a:xfrm>
           <a:prstGeom prst="pie">
             <a:avLst>
@@ -4889,8 +4924,8 @@
         </p:nvSpPr>
         <p:spPr>
           <a:xfrm rot="13500000">
-            <a:off x="3108960" y="91440"/>
-            <a:ext cx="9875520" cy="9875520"/>
+            <a:off x="3291840" y="182880"/>
+            <a:ext cx="10241280" cy="10241280"/>
           </a:xfrm>
           <a:prstGeom prst="blockArc">
             <a:avLst>
@@ -4963,8 +4998,8 @@
         </p:nvSpPr>
         <p:spPr>
           <a:xfrm rot="15210000">
-            <a:off x="3108960" y="91440"/>
-            <a:ext cx="9875520" cy="9875520"/>
+            <a:off x="3291840" y="182880"/>
+            <a:ext cx="10241280" cy="10241280"/>
           </a:xfrm>
           <a:prstGeom prst="blockArc">
             <a:avLst>
@@ -5037,8 +5072,8 @@
         </p:nvSpPr>
         <p:spPr>
           <a:xfrm rot="16920000">
-            <a:off x="3108960" y="91440"/>
-            <a:ext cx="9875520" cy="9875520"/>
+            <a:off x="3291840" y="182880"/>
+            <a:ext cx="10241280" cy="10241280"/>
           </a:xfrm>
           <a:prstGeom prst="blockArc">
             <a:avLst>
@@ -5111,8 +5146,8 @@
         </p:nvSpPr>
         <p:spPr>
           <a:xfrm rot="18630000">
-            <a:off x="3108960" y="91440"/>
-            <a:ext cx="9875520" cy="9875520"/>
+            <a:off x="3291840" y="182880"/>
+            <a:ext cx="10241280" cy="10241280"/>
           </a:xfrm>
           <a:prstGeom prst="blockArc">
             <a:avLst>
@@ -5185,8 +5220,8 @@
         </p:nvSpPr>
         <p:spPr>
           <a:xfrm rot="20340000">
-            <a:off x="3108960" y="91440"/>
-            <a:ext cx="9875520" cy="9875520"/>
+            <a:off x="3291840" y="182880"/>
+            <a:ext cx="10241280" cy="10241280"/>
           </a:xfrm>
           <a:prstGeom prst="blockArc">
             <a:avLst>
@@ -5259,8 +5294,8 @@
         </p:nvSpPr>
         <p:spPr>
           <a:xfrm rot="450000">
-            <a:off x="3108960" y="91440"/>
-            <a:ext cx="9875520" cy="9875520"/>
+            <a:off x="3291840" y="182880"/>
+            <a:ext cx="10241280" cy="10241280"/>
           </a:xfrm>
           <a:prstGeom prst="blockArc">
             <a:avLst>
@@ -5333,7 +5368,7 @@
         </p:nvSpPr>
         <p:spPr>
           <a:xfrm>
-            <a:off x="7662672" y="4645152"/>
+            <a:off x="8028432" y="4919472"/>
             <a:ext cx="768096" cy="768096"/>
           </a:xfrm>
           <a:prstGeom prst="ellipse">
@@ -5378,7 +5413,7 @@
         </p:nvSpPr>
         <p:spPr>
           <a:xfrm>
-            <a:off x="7827264" y="4809744"/>
+            <a:off x="8193024" y="5084064"/>
             <a:ext cx="438912" cy="438912"/>
           </a:xfrm>
           <a:prstGeom prst="ellipse">
@@ -5421,7 +5456,7 @@
         </p:nvSpPr>
         <p:spPr>
           <a:xfrm>
-            <a:off x="7927848" y="4910328"/>
+            <a:off x="8293608" y="5184648"/>
             <a:ext cx="237744" cy="237744"/>
           </a:xfrm>
           <a:prstGeom prst="ellipse">
@@ -5464,8 +5499,8 @@
         </p:nvSpPr>
         <p:spPr>
           <a:xfrm>
-            <a:off x="3474720" y="594360"/>
-            <a:ext cx="5303520" cy="1371600"/>
+            <a:off x="1097280" y="777240"/>
+            <a:ext cx="4572000" cy="1371600"/>
           </a:xfrm>
           <a:prstGeom prst="rect">
             <a:avLst/>
@@ -5479,7 +5514,7 @@
           <a:lstStyle/>
           <a:p>
             <a:pPr>
-              <a:defRPr sz="5600" b="1">
+              <a:defRPr sz="5400" b="1">
                 <a:solidFill>
                   <a:srgbClr val="142012"/>
                 </a:solidFill>
@@ -5499,7 +5534,7 @@
         </p:nvSpPr>
         <p:spPr>
           <a:xfrm>
-            <a:off x="8961120" y="868680"/>
+            <a:off x="5029200" y="960120"/>
             <a:ext cx="621792" cy="621792"/>
           </a:xfrm>
           <a:prstGeom prst="roundRect">
@@ -5547,14 +5582,14 @@
       </p:sp>
       <p:sp>
         <p:nvSpPr>
-          <p:cNvPr id="23" name="!!PoemCol0"/>
+          <p:cNvPr id="23" name="!!SubTitle"/>
           <p:cNvSpPr txBox="1"/>
           <p:nvPr/>
         </p:nvSpPr>
         <p:spPr>
           <a:xfrm>
-            <a:off x="2926080" y="2011680"/>
-            <a:ext cx="347472" cy="3291840"/>
+            <a:off x="1097280" y="2011680"/>
+            <a:ext cx="5029200" cy="731520"/>
           </a:xfrm>
           <a:prstGeom prst="rect">
             <a:avLst/>
@@ -5562,57 +5597,33 @@
           <a:noFill/>
         </p:spPr>
         <p:txBody>
-          <a:bodyPr wrap="square">
+          <a:bodyPr wrap="none">
             <a:spAutoFit/>
           </a:bodyPr>
           <a:lstStyle/>
           <a:p>
-            <a:pPr algn="ctr">
-              <a:defRPr sz="1500">
+            <a:pPr>
+              <a:defRPr sz="1400">
                 <a:solidFill>
-                  <a:srgbClr val="384E32"/>
+                  <a:srgbClr val="465F41"/>
                 </a:solidFill>
               </a:defRPr>
             </a:pPr>
             <a:r>
-              <a:t>寒</a:t>
-            </a:r>
-            <a:br/>
-            <a:r>
-              <a:t>蝉</a:t>
-            </a:r>
-            <a:br/>
-            <a:r>
-              <a:t>凄</a:t>
-            </a:r>
-            <a:br/>
-            <a:r>
-              <a:t>切</a:t>
-            </a:r>
-            <a:br/>
-            <a:r>
-              <a:t>骤</a:t>
-            </a:r>
-            <a:br/>
-            <a:r>
-              <a:t>雨</a:t>
-            </a:r>
-            <a:br/>
-            <a:r>
-              <a:t>歇</a:t>
-            </a:r>
-          </a:p>
-        </p:txBody>
-      </p:sp>
-      <p:sp>
-        <p:nvSpPr>
-          <p:cNvPr id="24" name="!!PoemCol1"/>
+              <a:t>北宋 · 柳永  ｜  秋蝉凄清 · 骤雨初歇 · 晓风残月</a:t>
+            </a:r>
+          </a:p>
+        </p:txBody>
+      </p:sp>
+      <p:sp>
+        <p:nvSpPr>
+          <p:cNvPr id="24" name="!!PoemCol0"/>
           <p:cNvSpPr txBox="1"/>
           <p:nvPr/>
         </p:nvSpPr>
         <p:spPr>
           <a:xfrm>
-            <a:off x="2377440" y="2011680"/>
+            <a:off x="2926080" y="2743200"/>
             <a:ext cx="347472" cy="3291840"/>
           </a:xfrm>
           <a:prstGeom prst="rect">
@@ -5629,49 +5640,49 @@
             <a:pPr algn="ctr">
               <a:defRPr sz="1500">
                 <a:solidFill>
-                  <a:srgbClr val="384E32"/>
+                  <a:srgbClr val="30442C"/>
                 </a:solidFill>
               </a:defRPr>
             </a:pPr>
             <a:r>
-              <a:t>多</a:t>
+              <a:t>寒</a:t>
             </a:r>
             <a:br/>
             <a:r>
-              <a:t>情</a:t>
+              <a:t>蝉</a:t>
             </a:r>
             <a:br/>
             <a:r>
-              <a:t>自</a:t>
+              <a:t>凄</a:t>
             </a:r>
             <a:br/>
             <a:r>
-              <a:t>古</a:t>
+              <a:t>切</a:t>
             </a:r>
             <a:br/>
             <a:r>
-              <a:t>伤</a:t>
+              <a:t>骤</a:t>
             </a:r>
             <a:br/>
             <a:r>
-              <a:t>离</a:t>
+              <a:t>雨</a:t>
             </a:r>
             <a:br/>
             <a:r>
-              <a:t>别</a:t>
-            </a:r>
-          </a:p>
-        </p:txBody>
-      </p:sp>
-      <p:sp>
-        <p:nvSpPr>
-          <p:cNvPr id="25" name="!!PoemCol2"/>
+              <a:t>歇</a:t>
+            </a:r>
+          </a:p>
+        </p:txBody>
+      </p:sp>
+      <p:sp>
+        <p:nvSpPr>
+          <p:cNvPr id="25" name="!!PoemCol1"/>
           <p:cNvSpPr txBox="1"/>
           <p:nvPr/>
         </p:nvSpPr>
         <p:spPr>
           <a:xfrm>
-            <a:off x="1828800" y="2011680"/>
+            <a:off x="2377440" y="2743200"/>
             <a:ext cx="347472" cy="3291840"/>
           </a:xfrm>
           <a:prstGeom prst="rect">
@@ -5688,49 +5699,49 @@
             <a:pPr algn="ctr">
               <a:defRPr sz="1500">
                 <a:solidFill>
-                  <a:srgbClr val="384E32"/>
+                  <a:srgbClr val="30442C"/>
                 </a:solidFill>
               </a:defRPr>
             </a:pPr>
             <a:r>
-              <a:t>今</a:t>
+              <a:t>多</a:t>
             </a:r>
             <a:br/>
             <a:r>
-              <a:t>宵</a:t>
+              <a:t>情</a:t>
             </a:r>
             <a:br/>
             <a:r>
-              <a:t>酒</a:t>
+              <a:t>自</a:t>
             </a:r>
             <a:br/>
             <a:r>
-              <a:t>醒</a:t>
+              <a:t>古</a:t>
             </a:r>
             <a:br/>
             <a:r>
-              <a:t>杨</a:t>
+              <a:t>伤</a:t>
             </a:r>
             <a:br/>
             <a:r>
-              <a:t>柳</a:t>
+              <a:t>离</a:t>
             </a:r>
             <a:br/>
             <a:r>
-              <a:t>岸</a:t>
-            </a:r>
-          </a:p>
-        </p:txBody>
-      </p:sp>
-      <p:sp>
-        <p:nvSpPr>
-          <p:cNvPr id="26" name="!!PoemCol3"/>
+              <a:t>别</a:t>
+            </a:r>
+          </a:p>
+        </p:txBody>
+      </p:sp>
+      <p:sp>
+        <p:nvSpPr>
+          <p:cNvPr id="26" name="!!PoemCol2"/>
           <p:cNvSpPr txBox="1"/>
           <p:nvPr/>
         </p:nvSpPr>
         <p:spPr>
           <a:xfrm>
-            <a:off x="1280160" y="2011680"/>
+            <a:off x="1828800" y="2743200"/>
             <a:ext cx="347472" cy="3291840"/>
           </a:xfrm>
           <a:prstGeom prst="rect">
@@ -5747,7 +5758,66 @@
             <a:pPr algn="ctr">
               <a:defRPr sz="1500">
                 <a:solidFill>
-                  <a:srgbClr val="384E32"/>
+                  <a:srgbClr val="30442C"/>
+                </a:solidFill>
+              </a:defRPr>
+            </a:pPr>
+            <a:r>
+              <a:t>今</a:t>
+            </a:r>
+            <a:br/>
+            <a:r>
+              <a:t>宵</a:t>
+            </a:r>
+            <a:br/>
+            <a:r>
+              <a:t>酒</a:t>
+            </a:r>
+            <a:br/>
+            <a:r>
+              <a:t>醒</a:t>
+            </a:r>
+            <a:br/>
+            <a:r>
+              <a:t>杨</a:t>
+            </a:r>
+            <a:br/>
+            <a:r>
+              <a:t>柳</a:t>
+            </a:r>
+            <a:br/>
+            <a:r>
+              <a:t>岸</a:t>
+            </a:r>
+          </a:p>
+        </p:txBody>
+      </p:sp>
+      <p:sp>
+        <p:nvSpPr>
+          <p:cNvPr id="27" name="!!PoemCol3"/>
+          <p:cNvSpPr txBox="1"/>
+          <p:nvPr/>
+        </p:nvSpPr>
+        <p:spPr>
+          <a:xfrm>
+            <a:off x="1280160" y="2743200"/>
+            <a:ext cx="347472" cy="3291840"/>
+          </a:xfrm>
+          <a:prstGeom prst="rect">
+            <a:avLst/>
+          </a:prstGeom>
+          <a:noFill/>
+        </p:spPr>
+        <p:txBody>
+          <a:bodyPr wrap="square">
+            <a:spAutoFit/>
+          </a:bodyPr>
+          <a:lstStyle/>
+          <a:p>
+            <a:pPr algn="ctr">
+              <a:defRPr sz="1500">
+                <a:solidFill>
+                  <a:srgbClr val="30442C"/>
                 </a:solidFill>
               </a:defRPr>
             </a:pPr>

--- a/knowledge/Productivity/Fan_Native_Master.pptx
+++ b/knowledge/Productivity/Fan_Native_Master.pptx
@@ -3132,7 +3132,7 @@
           </a:ln>
           <a:solidFill>
             <a:srgbClr val="FFFFFF">
-              <a:alpha val="26000"/>
+              <a:alpha val="35000"/>
             </a:srgbClr>
           </a:solidFill>
         </p:spPr>
@@ -3176,7 +3176,7 @@
             </a:avLst>
           </a:prstGeom>
           <a:solidFill>
-            <a:srgbClr val="A07D4B"/>
+            <a:srgbClr val="A58255"/>
           </a:solidFill>
           <a:ln>
             <a:noFill/>
@@ -3222,7 +3222,7 @@
             </a:avLst>
           </a:prstGeom>
           <a:solidFill>
-            <a:srgbClr val="A07D4B"/>
+            <a:srgbClr val="A58255"/>
           </a:solidFill>
           <a:ln>
             <a:noFill/>
@@ -3268,7 +3268,7 @@
             </a:avLst>
           </a:prstGeom>
           <a:solidFill>
-            <a:srgbClr val="A07D4B"/>
+            <a:srgbClr val="A58255"/>
           </a:solidFill>
           <a:ln>
             <a:noFill/>
@@ -3314,7 +3314,7 @@
             </a:avLst>
           </a:prstGeom>
           <a:solidFill>
-            <a:srgbClr val="A07D4B"/>
+            <a:srgbClr val="A58255"/>
           </a:solidFill>
           <a:ln>
             <a:noFill/>
@@ -3360,7 +3360,7 @@
             </a:avLst>
           </a:prstGeom>
           <a:solidFill>
-            <a:srgbClr val="A07D4B"/>
+            <a:srgbClr val="A58255"/>
           </a:solidFill>
           <a:ln>
             <a:noFill/>
@@ -3406,7 +3406,7 @@
             </a:avLst>
           </a:prstGeom>
           <a:solidFill>
-            <a:srgbClr val="A07D4B"/>
+            <a:srgbClr val="A58255"/>
           </a:solidFill>
           <a:ln>
             <a:noFill/>
@@ -3452,7 +3452,7 @@
             </a:avLst>
           </a:prstGeom>
           <a:solidFill>
-            <a:srgbClr val="785A37"/>
+            <a:srgbClr val="7D5F3C"/>
           </a:solidFill>
           <a:ln>
             <a:noFill/>
@@ -3498,7 +3498,7 @@
             </a:avLst>
           </a:prstGeom>
           <a:solidFill>
-            <a:srgbClr val="785A37"/>
+            <a:srgbClr val="7D5F3C"/>
           </a:solidFill>
           <a:ln>
             <a:noFill/>
@@ -3549,31 +3549,17 @@
               <a:srgbClr val="D7B97D"/>
             </a:solidFill>
           </a:ln>
-          <a:gradFill flip="none" rotWithShape="1">
-            <a:gsLst>
-              <a:gs pos="0">
-                <a:srgbClr val="B8D4A4">
-                  <a:alpha val="88000"/>
-                </a:srgbClr>
-              </a:gs>
-              <a:gs pos="45000">
-                <a:srgbClr val="78A365">
-                  <a:alpha val="82000"/>
-                </a:srgbClr>
-              </a:gs>
-              <a:gs pos="100000">
-                <a:srgbClr val="36522E">
-                  <a:alpha val="92000"/>
-                </a:srgbClr>
-              </a:gs>
-            </a:gsLst>
-            <a:lin ang="5400000"/>
-          </a:gradFill>
+          <a:blipFill rotWithShape="0">
+            <a:blip r:embed="rId2"/>
+            <a:stretch>
+              <a:fillRect/>
+            </a:stretch>
+          </a:blipFill>
           <a:effectLst>
-            <a:softEdge rad="25400"/>
+            <a:softEdge rad="15000"/>
             <a:outerShdw blurRad="63500" dist="0" dir="0" algn="ctr" rotWithShape="0">
               <a:srgbClr val="000000">
-                <a:alpha val="15000"/>
+                <a:alpha val="20000"/>
               </a:srgbClr>
             </a:outerShdw>
           </a:effectLst>
@@ -3623,31 +3609,17 @@
               <a:srgbClr val="D7B97D"/>
             </a:solidFill>
           </a:ln>
-          <a:gradFill flip="none" rotWithShape="1">
-            <a:gsLst>
-              <a:gs pos="0">
-                <a:srgbClr val="B8D4A4">
-                  <a:alpha val="88000"/>
-                </a:srgbClr>
-              </a:gs>
-              <a:gs pos="45000">
-                <a:srgbClr val="78A365">
-                  <a:alpha val="82000"/>
-                </a:srgbClr>
-              </a:gs>
-              <a:gs pos="100000">
-                <a:srgbClr val="36522E">
-                  <a:alpha val="92000"/>
-                </a:srgbClr>
-              </a:gs>
-            </a:gsLst>
-            <a:lin ang="5400000"/>
-          </a:gradFill>
+          <a:blipFill rotWithShape="0">
+            <a:blip r:embed="rId2"/>
+            <a:stretch>
+              <a:fillRect/>
+            </a:stretch>
+          </a:blipFill>
           <a:effectLst>
-            <a:softEdge rad="25400"/>
+            <a:softEdge rad="15000"/>
             <a:outerShdw blurRad="63500" dist="0" dir="0" algn="ctr" rotWithShape="0">
               <a:srgbClr val="000000">
-                <a:alpha val="15000"/>
+                <a:alpha val="20000"/>
               </a:srgbClr>
             </a:outerShdw>
           </a:effectLst>
@@ -3697,31 +3669,17 @@
               <a:srgbClr val="D7B97D"/>
             </a:solidFill>
           </a:ln>
-          <a:gradFill flip="none" rotWithShape="1">
-            <a:gsLst>
-              <a:gs pos="0">
-                <a:srgbClr val="B8D4A4">
-                  <a:alpha val="88000"/>
-                </a:srgbClr>
-              </a:gs>
-              <a:gs pos="45000">
-                <a:srgbClr val="78A365">
-                  <a:alpha val="82000"/>
-                </a:srgbClr>
-              </a:gs>
-              <a:gs pos="100000">
-                <a:srgbClr val="36522E">
-                  <a:alpha val="92000"/>
-                </a:srgbClr>
-              </a:gs>
-            </a:gsLst>
-            <a:lin ang="5400000"/>
-          </a:gradFill>
+          <a:blipFill rotWithShape="0">
+            <a:blip r:embed="rId2"/>
+            <a:stretch>
+              <a:fillRect/>
+            </a:stretch>
+          </a:blipFill>
           <a:effectLst>
-            <a:softEdge rad="25400"/>
+            <a:softEdge rad="15000"/>
             <a:outerShdw blurRad="63500" dist="0" dir="0" algn="ctr" rotWithShape="0">
               <a:srgbClr val="000000">
-                <a:alpha val="15000"/>
+                <a:alpha val="20000"/>
               </a:srgbClr>
             </a:outerShdw>
           </a:effectLst>
@@ -3771,31 +3729,17 @@
               <a:srgbClr val="D7B97D"/>
             </a:solidFill>
           </a:ln>
-          <a:gradFill flip="none" rotWithShape="1">
-            <a:gsLst>
-              <a:gs pos="0">
-                <a:srgbClr val="B8D4A4">
-                  <a:alpha val="88000"/>
-                </a:srgbClr>
-              </a:gs>
-              <a:gs pos="45000">
-                <a:srgbClr val="78A365">
-                  <a:alpha val="82000"/>
-                </a:srgbClr>
-              </a:gs>
-              <a:gs pos="100000">
-                <a:srgbClr val="36522E">
-                  <a:alpha val="92000"/>
-                </a:srgbClr>
-              </a:gs>
-            </a:gsLst>
-            <a:lin ang="5400000"/>
-          </a:gradFill>
+          <a:blipFill rotWithShape="0">
+            <a:blip r:embed="rId2"/>
+            <a:stretch>
+              <a:fillRect/>
+            </a:stretch>
+          </a:blipFill>
           <a:effectLst>
-            <a:softEdge rad="25400"/>
+            <a:softEdge rad="15000"/>
             <a:outerShdw blurRad="63500" dist="0" dir="0" algn="ctr" rotWithShape="0">
               <a:srgbClr val="000000">
-                <a:alpha val="15000"/>
+                <a:alpha val="20000"/>
               </a:srgbClr>
             </a:outerShdw>
           </a:effectLst>
@@ -3845,31 +3789,17 @@
               <a:srgbClr val="D7B97D"/>
             </a:solidFill>
           </a:ln>
-          <a:gradFill flip="none" rotWithShape="1">
-            <a:gsLst>
-              <a:gs pos="0">
-                <a:srgbClr val="B8D4A4">
-                  <a:alpha val="88000"/>
-                </a:srgbClr>
-              </a:gs>
-              <a:gs pos="45000">
-                <a:srgbClr val="78A365">
-                  <a:alpha val="82000"/>
-                </a:srgbClr>
-              </a:gs>
-              <a:gs pos="100000">
-                <a:srgbClr val="36522E">
-                  <a:alpha val="92000"/>
-                </a:srgbClr>
-              </a:gs>
-            </a:gsLst>
-            <a:lin ang="5400000"/>
-          </a:gradFill>
+          <a:blipFill rotWithShape="0">
+            <a:blip r:embed="rId2"/>
+            <a:stretch>
+              <a:fillRect/>
+            </a:stretch>
+          </a:blipFill>
           <a:effectLst>
-            <a:softEdge rad="25400"/>
+            <a:softEdge rad="15000"/>
             <a:outerShdw blurRad="63500" dist="0" dir="0" algn="ctr" rotWithShape="0">
               <a:srgbClr val="000000">
-                <a:alpha val="15000"/>
+                <a:alpha val="20000"/>
               </a:srgbClr>
             </a:outerShdw>
           </a:effectLst>
@@ -3919,31 +3849,17 @@
               <a:srgbClr val="D7B97D"/>
             </a:solidFill>
           </a:ln>
-          <a:gradFill flip="none" rotWithShape="1">
-            <a:gsLst>
-              <a:gs pos="0">
-                <a:srgbClr val="B8D4A4">
-                  <a:alpha val="88000"/>
-                </a:srgbClr>
-              </a:gs>
-              <a:gs pos="45000">
-                <a:srgbClr val="78A365">
-                  <a:alpha val="82000"/>
-                </a:srgbClr>
-              </a:gs>
-              <a:gs pos="100000">
-                <a:srgbClr val="36522E">
-                  <a:alpha val="92000"/>
-                </a:srgbClr>
-              </a:gs>
-            </a:gsLst>
-            <a:lin ang="5400000"/>
-          </a:gradFill>
+          <a:blipFill rotWithShape="0">
+            <a:blip r:embed="rId2"/>
+            <a:stretch>
+              <a:fillRect/>
+            </a:stretch>
+          </a:blipFill>
           <a:effectLst>
-            <a:softEdge rad="25400"/>
+            <a:softEdge rad="15000"/>
             <a:outerShdw blurRad="63500" dist="0" dir="0" algn="ctr" rotWithShape="0">
               <a:srgbClr val="000000">
-                <a:alpha val="15000"/>
+                <a:alpha val="20000"/>
               </a:srgbClr>
             </a:outerShdw>
           </a:effectLst>
@@ -4522,7 +4438,7 @@
           </a:ln>
           <a:solidFill>
             <a:srgbClr val="FFFFFF">
-              <a:alpha val="26000"/>
+              <a:alpha val="35000"/>
             </a:srgbClr>
           </a:solidFill>
         </p:spPr>
@@ -4566,7 +4482,7 @@
             </a:avLst>
           </a:prstGeom>
           <a:solidFill>
-            <a:srgbClr val="A07D4B"/>
+            <a:srgbClr val="A58255"/>
           </a:solidFill>
           <a:ln>
             <a:noFill/>
@@ -4612,7 +4528,7 @@
             </a:avLst>
           </a:prstGeom>
           <a:solidFill>
-            <a:srgbClr val="A07D4B"/>
+            <a:srgbClr val="A58255"/>
           </a:solidFill>
           <a:ln>
             <a:noFill/>
@@ -4658,7 +4574,7 @@
             </a:avLst>
           </a:prstGeom>
           <a:solidFill>
-            <a:srgbClr val="A07D4B"/>
+            <a:srgbClr val="A58255"/>
           </a:solidFill>
           <a:ln>
             <a:noFill/>
@@ -4704,7 +4620,7 @@
             </a:avLst>
           </a:prstGeom>
           <a:solidFill>
-            <a:srgbClr val="A07D4B"/>
+            <a:srgbClr val="A58255"/>
           </a:solidFill>
           <a:ln>
             <a:noFill/>
@@ -4750,7 +4666,7 @@
             </a:avLst>
           </a:prstGeom>
           <a:solidFill>
-            <a:srgbClr val="A07D4B"/>
+            <a:srgbClr val="A58255"/>
           </a:solidFill>
           <a:ln>
             <a:noFill/>
@@ -4796,7 +4712,7 @@
             </a:avLst>
           </a:prstGeom>
           <a:solidFill>
-            <a:srgbClr val="A07D4B"/>
+            <a:srgbClr val="A58255"/>
           </a:solidFill>
           <a:ln>
             <a:noFill/>
@@ -4842,7 +4758,7 @@
             </a:avLst>
           </a:prstGeom>
           <a:solidFill>
-            <a:srgbClr val="785A37"/>
+            <a:srgbClr val="7D5F3C"/>
           </a:solidFill>
           <a:ln>
             <a:noFill/>
@@ -4888,7 +4804,7 @@
             </a:avLst>
           </a:prstGeom>
           <a:solidFill>
-            <a:srgbClr val="785A37"/>
+            <a:srgbClr val="7D5F3C"/>
           </a:solidFill>
           <a:ln>
             <a:noFill/>
@@ -4939,31 +4855,17 @@
               <a:srgbClr val="D7B97D"/>
             </a:solidFill>
           </a:ln>
-          <a:gradFill flip="none" rotWithShape="1">
-            <a:gsLst>
-              <a:gs pos="0">
-                <a:srgbClr val="B8D4A4">
-                  <a:alpha val="88000"/>
-                </a:srgbClr>
-              </a:gs>
-              <a:gs pos="45000">
-                <a:srgbClr val="78A365">
-                  <a:alpha val="82000"/>
-                </a:srgbClr>
-              </a:gs>
-              <a:gs pos="100000">
-                <a:srgbClr val="36522E">
-                  <a:alpha val="92000"/>
-                </a:srgbClr>
-              </a:gs>
-            </a:gsLst>
-            <a:lin ang="5400000"/>
-          </a:gradFill>
+          <a:blipFill rotWithShape="0">
+            <a:blip r:embed="rId2"/>
+            <a:stretch>
+              <a:fillRect/>
+            </a:stretch>
+          </a:blipFill>
           <a:effectLst>
-            <a:softEdge rad="25400"/>
+            <a:softEdge rad="15000"/>
             <a:outerShdw blurRad="63500" dist="0" dir="0" algn="ctr" rotWithShape="0">
               <a:srgbClr val="000000">
-                <a:alpha val="15000"/>
+                <a:alpha val="20000"/>
               </a:srgbClr>
             </a:outerShdw>
           </a:effectLst>
@@ -5013,31 +4915,17 @@
               <a:srgbClr val="D7B97D"/>
             </a:solidFill>
           </a:ln>
-          <a:gradFill flip="none" rotWithShape="1">
-            <a:gsLst>
-              <a:gs pos="0">
-                <a:srgbClr val="B8D4A4">
-                  <a:alpha val="88000"/>
-                </a:srgbClr>
-              </a:gs>
-              <a:gs pos="45000">
-                <a:srgbClr val="78A365">
-                  <a:alpha val="82000"/>
-                </a:srgbClr>
-              </a:gs>
-              <a:gs pos="100000">
-                <a:srgbClr val="36522E">
-                  <a:alpha val="92000"/>
-                </a:srgbClr>
-              </a:gs>
-            </a:gsLst>
-            <a:lin ang="5400000"/>
-          </a:gradFill>
+          <a:blipFill rotWithShape="0">
+            <a:blip r:embed="rId2"/>
+            <a:stretch>
+              <a:fillRect/>
+            </a:stretch>
+          </a:blipFill>
           <a:effectLst>
-            <a:softEdge rad="25400"/>
+            <a:softEdge rad="15000"/>
             <a:outerShdw blurRad="63500" dist="0" dir="0" algn="ctr" rotWithShape="0">
               <a:srgbClr val="000000">
-                <a:alpha val="15000"/>
+                <a:alpha val="20000"/>
               </a:srgbClr>
             </a:outerShdw>
           </a:effectLst>
@@ -5087,31 +4975,17 @@
               <a:srgbClr val="D7B97D"/>
             </a:solidFill>
           </a:ln>
-          <a:gradFill flip="none" rotWithShape="1">
-            <a:gsLst>
-              <a:gs pos="0">
-                <a:srgbClr val="B8D4A4">
-                  <a:alpha val="88000"/>
-                </a:srgbClr>
-              </a:gs>
-              <a:gs pos="45000">
-                <a:srgbClr val="78A365">
-                  <a:alpha val="82000"/>
-                </a:srgbClr>
-              </a:gs>
-              <a:gs pos="100000">
-                <a:srgbClr val="36522E">
-                  <a:alpha val="92000"/>
-                </a:srgbClr>
-              </a:gs>
-            </a:gsLst>
-            <a:lin ang="5400000"/>
-          </a:gradFill>
+          <a:blipFill rotWithShape="0">
+            <a:blip r:embed="rId2"/>
+            <a:stretch>
+              <a:fillRect/>
+            </a:stretch>
+          </a:blipFill>
           <a:effectLst>
-            <a:softEdge rad="25400"/>
+            <a:softEdge rad="15000"/>
             <a:outerShdw blurRad="63500" dist="0" dir="0" algn="ctr" rotWithShape="0">
               <a:srgbClr val="000000">
-                <a:alpha val="15000"/>
+                <a:alpha val="20000"/>
               </a:srgbClr>
             </a:outerShdw>
           </a:effectLst>
@@ -5161,31 +5035,17 @@
               <a:srgbClr val="D7B97D"/>
             </a:solidFill>
           </a:ln>
-          <a:gradFill flip="none" rotWithShape="1">
-            <a:gsLst>
-              <a:gs pos="0">
-                <a:srgbClr val="B8D4A4">
-                  <a:alpha val="88000"/>
-                </a:srgbClr>
-              </a:gs>
-              <a:gs pos="45000">
-                <a:srgbClr val="78A365">
-                  <a:alpha val="82000"/>
-                </a:srgbClr>
-              </a:gs>
-              <a:gs pos="100000">
-                <a:srgbClr val="36522E">
-                  <a:alpha val="92000"/>
-                </a:srgbClr>
-              </a:gs>
-            </a:gsLst>
-            <a:lin ang="5400000"/>
-          </a:gradFill>
+          <a:blipFill rotWithShape="0">
+            <a:blip r:embed="rId2"/>
+            <a:stretch>
+              <a:fillRect/>
+            </a:stretch>
+          </a:blipFill>
           <a:effectLst>
-            <a:softEdge rad="25400"/>
+            <a:softEdge rad="15000"/>
             <a:outerShdw blurRad="63500" dist="0" dir="0" algn="ctr" rotWithShape="0">
               <a:srgbClr val="000000">
-                <a:alpha val="15000"/>
+                <a:alpha val="20000"/>
               </a:srgbClr>
             </a:outerShdw>
           </a:effectLst>
@@ -5235,31 +5095,17 @@
               <a:srgbClr val="D7B97D"/>
             </a:solidFill>
           </a:ln>
-          <a:gradFill flip="none" rotWithShape="1">
-            <a:gsLst>
-              <a:gs pos="0">
-                <a:srgbClr val="B8D4A4">
-                  <a:alpha val="88000"/>
-                </a:srgbClr>
-              </a:gs>
-              <a:gs pos="45000">
-                <a:srgbClr val="78A365">
-                  <a:alpha val="82000"/>
-                </a:srgbClr>
-              </a:gs>
-              <a:gs pos="100000">
-                <a:srgbClr val="36522E">
-                  <a:alpha val="92000"/>
-                </a:srgbClr>
-              </a:gs>
-            </a:gsLst>
-            <a:lin ang="5400000"/>
-          </a:gradFill>
+          <a:blipFill rotWithShape="0">
+            <a:blip r:embed="rId2"/>
+            <a:stretch>
+              <a:fillRect/>
+            </a:stretch>
+          </a:blipFill>
           <a:effectLst>
-            <a:softEdge rad="25400"/>
+            <a:softEdge rad="15000"/>
             <a:outerShdw blurRad="63500" dist="0" dir="0" algn="ctr" rotWithShape="0">
               <a:srgbClr val="000000">
-                <a:alpha val="15000"/>
+                <a:alpha val="20000"/>
               </a:srgbClr>
             </a:outerShdw>
           </a:effectLst>
@@ -5309,31 +5155,17 @@
               <a:srgbClr val="D7B97D"/>
             </a:solidFill>
           </a:ln>
-          <a:gradFill flip="none" rotWithShape="1">
-            <a:gsLst>
-              <a:gs pos="0">
-                <a:srgbClr val="B8D4A4">
-                  <a:alpha val="88000"/>
-                </a:srgbClr>
-              </a:gs>
-              <a:gs pos="45000">
-                <a:srgbClr val="78A365">
-                  <a:alpha val="82000"/>
-                </a:srgbClr>
-              </a:gs>
-              <a:gs pos="100000">
-                <a:srgbClr val="36522E">
-                  <a:alpha val="92000"/>
-                </a:srgbClr>
-              </a:gs>
-            </a:gsLst>
-            <a:lin ang="5400000"/>
-          </a:gradFill>
+          <a:blipFill rotWithShape="0">
+            <a:blip r:embed="rId2"/>
+            <a:stretch>
+              <a:fillRect/>
+            </a:stretch>
+          </a:blipFill>
           <a:effectLst>
-            <a:softEdge rad="25400"/>
+            <a:softEdge rad="15000"/>
             <a:outerShdw blurRad="63500" dist="0" dir="0" algn="ctr" rotWithShape="0">
               <a:srgbClr val="000000">
-                <a:alpha val="15000"/>
+                <a:alpha val="20000"/>
               </a:srgbClr>
             </a:outerShdw>
           </a:effectLst>
